--- a/figures/chemical_diff.pptx
+++ b/figures/chemical_diff.pptx
@@ -104,6 +104,11 @@
       </a:defRPr>
     </a:lvl9pPr>
   </p:defaultTextStyle>
+  <p:extLst>
+    <p:ext uri="{EFAFB233-063F-42B5-8137-9DF3F51BA10A}">
+      <p15:sldGuideLst xmlns:p15="http://schemas.microsoft.com/office/powerpoint/2012/main"/>
+    </p:ext>
+  </p:extLst>
 </p:presentation>
 </file>
 
@@ -254,7 +259,7 @@
           <a:p>
             <a:fld id="{D3DB91BC-4593-4AC4-AC1F-B01F4659B8C3}" type="datetimeFigureOut">
               <a:rPr lang="en-US" smtClean="0"/>
-              <a:t>10/1/2026</a:t>
+              <a:t>10/11/2026</a:t>
             </a:fld>
             <a:endParaRPr lang="en-US"/>
           </a:p>
@@ -452,7 +457,7 @@
           <a:p>
             <a:fld id="{D3DB91BC-4593-4AC4-AC1F-B01F4659B8C3}" type="datetimeFigureOut">
               <a:rPr lang="en-US" smtClean="0"/>
-              <a:t>10/1/2026</a:t>
+              <a:t>10/11/2026</a:t>
             </a:fld>
             <a:endParaRPr lang="en-US"/>
           </a:p>
@@ -660,7 +665,7 @@
           <a:p>
             <a:fld id="{D3DB91BC-4593-4AC4-AC1F-B01F4659B8C3}" type="datetimeFigureOut">
               <a:rPr lang="en-US" smtClean="0"/>
-              <a:t>10/1/2026</a:t>
+              <a:t>10/11/2026</a:t>
             </a:fld>
             <a:endParaRPr lang="en-US"/>
           </a:p>
@@ -858,7 +863,7 @@
           <a:p>
             <a:fld id="{D3DB91BC-4593-4AC4-AC1F-B01F4659B8C3}" type="datetimeFigureOut">
               <a:rPr lang="en-US" smtClean="0"/>
-              <a:t>10/1/2026</a:t>
+              <a:t>10/11/2026</a:t>
             </a:fld>
             <a:endParaRPr lang="en-US"/>
           </a:p>
@@ -1133,7 +1138,7 @@
           <a:p>
             <a:fld id="{D3DB91BC-4593-4AC4-AC1F-B01F4659B8C3}" type="datetimeFigureOut">
               <a:rPr lang="en-US" smtClean="0"/>
-              <a:t>10/1/2026</a:t>
+              <a:t>10/11/2026</a:t>
             </a:fld>
             <a:endParaRPr lang="en-US"/>
           </a:p>
@@ -1398,7 +1403,7 @@
           <a:p>
             <a:fld id="{D3DB91BC-4593-4AC4-AC1F-B01F4659B8C3}" type="datetimeFigureOut">
               <a:rPr lang="en-US" smtClean="0"/>
-              <a:t>10/1/2026</a:t>
+              <a:t>10/11/2026</a:t>
             </a:fld>
             <a:endParaRPr lang="en-US"/>
           </a:p>
@@ -1810,7 +1815,7 @@
           <a:p>
             <a:fld id="{D3DB91BC-4593-4AC4-AC1F-B01F4659B8C3}" type="datetimeFigureOut">
               <a:rPr lang="en-US" smtClean="0"/>
-              <a:t>10/1/2026</a:t>
+              <a:t>10/11/2026</a:t>
             </a:fld>
             <a:endParaRPr lang="en-US"/>
           </a:p>
@@ -1951,7 +1956,7 @@
           <a:p>
             <a:fld id="{D3DB91BC-4593-4AC4-AC1F-B01F4659B8C3}" type="datetimeFigureOut">
               <a:rPr lang="en-US" smtClean="0"/>
-              <a:t>10/1/2026</a:t>
+              <a:t>10/11/2026</a:t>
             </a:fld>
             <a:endParaRPr lang="en-US"/>
           </a:p>
@@ -2064,7 +2069,7 @@
           <a:p>
             <a:fld id="{D3DB91BC-4593-4AC4-AC1F-B01F4659B8C3}" type="datetimeFigureOut">
               <a:rPr lang="en-US" smtClean="0"/>
-              <a:t>10/1/2026</a:t>
+              <a:t>10/11/2026</a:t>
             </a:fld>
             <a:endParaRPr lang="en-US"/>
           </a:p>
@@ -2375,7 +2380,7 @@
           <a:p>
             <a:fld id="{D3DB91BC-4593-4AC4-AC1F-B01F4659B8C3}" type="datetimeFigureOut">
               <a:rPr lang="en-US" smtClean="0"/>
-              <a:t>10/1/2026</a:t>
+              <a:t>10/11/2026</a:t>
             </a:fld>
             <a:endParaRPr lang="en-US"/>
           </a:p>
@@ -2663,7 +2668,7 @@
           <a:p>
             <a:fld id="{D3DB91BC-4593-4AC4-AC1F-B01F4659B8C3}" type="datetimeFigureOut">
               <a:rPr lang="en-US" smtClean="0"/>
-              <a:t>10/1/2026</a:t>
+              <a:t>10/11/2026</a:t>
             </a:fld>
             <a:endParaRPr lang="en-US"/>
           </a:p>
@@ -2904,7 +2909,7 @@
           <a:p>
             <a:fld id="{D3DB91BC-4593-4AC4-AC1F-B01F4659B8C3}" type="datetimeFigureOut">
               <a:rPr lang="en-US" smtClean="0"/>
-              <a:t>10/1/2026</a:t>
+              <a:t>10/11/2026</a:t>
             </a:fld>
             <a:endParaRPr lang="en-US"/>
           </a:p>
@@ -3321,124 +3326,140 @@
           <a:chExt cx="0" cy="0"/>
         </a:xfrm>
       </p:grpSpPr>
-      <p:sp>
-        <p:nvSpPr>
-          <p:cNvPr id="4" name="Rectangle 3">
-            <a:extLst>
-              <a:ext uri="{FF2B5EF4-FFF2-40B4-BE49-F238E27FC236}">
-                <a16:creationId xmlns:a16="http://schemas.microsoft.com/office/drawing/2014/main" id="{A557B7AC-3EEA-B49B-3BAC-4D0A86F643D9}"/>
-              </a:ext>
-            </a:extLst>
-          </p:cNvPr>
-          <p:cNvSpPr/>
+      <mc:AlternateContent xmlns:mc="http://schemas.openxmlformats.org/markup-compatibility/2006" xmlns:a14="http://schemas.microsoft.com/office/drawing/2010/main">
+        <mc:Choice Requires="a14">
+          <p:sp>
+            <p:nvSpPr>
+              <p:cNvPr id="2" name="TextBox 1">
+                <a:extLst>
+                  <a:ext uri="{FF2B5EF4-FFF2-40B4-BE49-F238E27FC236}">
+                    <a16:creationId xmlns:a16="http://schemas.microsoft.com/office/drawing/2014/main" id="{E525CFB5-28EA-2AC4-6AA5-6DBAB60DBBF6}"/>
+                  </a:ext>
+                </a:extLst>
+              </p:cNvPr>
+              <p:cNvSpPr txBox="1"/>
+              <p:nvPr/>
+            </p:nvSpPr>
+            <p:spPr>
+              <a:xfrm>
+                <a:off x="1726959" y="1036863"/>
+                <a:ext cx="338842" cy="276999"/>
+              </a:xfrm>
+              <a:prstGeom prst="rect">
+                <a:avLst/>
+              </a:prstGeom>
+              <a:noFill/>
+            </p:spPr>
+            <p:txBody>
+              <a:bodyPr wrap="square" rtlCol="0">
+                <a:spAutoFit/>
+              </a:bodyPr>
+              <a:lstStyle/>
+              <a:p>
+                <a:pPr/>
+                <a14:m>
+                  <m:oMathPara xmlns:m="http://schemas.openxmlformats.org/officeDocument/2006/math">
+                    <m:oMath>
+                      <m:sSub>
+                        <m:sSubPr>
+                          <m:ctrlPr>
+                            <a:rPr lang="de-DE" sz="1200" i="1">
+                              <a:latin typeface="Cambria Math" panose="02040503050406030204" pitchFamily="18" charset="0"/>
+                            </a:rPr>
+                          </m:ctrlPr>
+                        </m:sSubPr>
+                        <m:e>
+                          <m:r>
+                            <m:rPr>
+                              <m:sty m:val="p"/>
+                            </m:rPr>
+                            <a:rPr lang="de-DE" sz="1200" i="1">
+                              <a:latin typeface="Cambria Math" panose="02040503050406030204" pitchFamily="18" charset="0"/>
+                            </a:rPr>
+                            <m:t>m</m:t>
+                          </m:r>
+                        </m:e>
+                        <m:sub>
+                          <m:r>
+                            <m:rPr>
+                              <m:sty m:val="p"/>
+                            </m:rPr>
+                            <a:rPr lang="de-DE" sz="1200" i="1">
+                              <a:latin typeface="Cambria Math" panose="02040503050406030204" pitchFamily="18" charset="0"/>
+                            </a:rPr>
+                            <m:t>in</m:t>
+                          </m:r>
+                        </m:sub>
+                      </m:sSub>
+                    </m:oMath>
+                  </m:oMathPara>
+                </a14:m>
+                <a:endParaRPr lang="en-US" sz="1200" dirty="0"/>
+              </a:p>
+            </p:txBody>
+          </p:sp>
+        </mc:Choice>
+        <mc:Fallback xmlns="">
+          <p:sp>
+            <p:nvSpPr>
+              <p:cNvPr id="2" name="TextBox 1">
+                <a:extLst>
+                  <a:ext uri="{FF2B5EF4-FFF2-40B4-BE49-F238E27FC236}">
+                    <a16:creationId xmlns:a16="http://schemas.microsoft.com/office/drawing/2014/main" id="{E525CFB5-28EA-2AC4-6AA5-6DBAB60DBBF6}"/>
+                  </a:ext>
+                </a:extLst>
+              </p:cNvPr>
+              <p:cNvSpPr txBox="1">
+                <a:spLocks noRot="1" noChangeAspect="1" noMove="1" noResize="1" noEditPoints="1" noAdjustHandles="1" noChangeArrowheads="1" noChangeShapeType="1" noTextEdit="1"/>
+              </p:cNvSpPr>
+              <p:nvPr/>
+            </p:nvSpPr>
+            <p:spPr>
+              <a:xfrm>
+                <a:off x="1726959" y="1036863"/>
+                <a:ext cx="338842" cy="276999"/>
+              </a:xfrm>
+              <a:prstGeom prst="rect">
+                <a:avLst/>
+              </a:prstGeom>
+              <a:blipFill>
+                <a:blip r:embed="rId2"/>
+                <a:stretch>
+                  <a:fillRect r="-7143"/>
+                </a:stretch>
+              </a:blipFill>
+            </p:spPr>
+            <p:txBody>
+              <a:bodyPr/>
+              <a:lstStyle/>
+              <a:p>
+                <a:r>
+                  <a:rPr lang="en-US">
+                    <a:noFill/>
+                  </a:rPr>
+                  <a:t> </a:t>
+                </a:r>
+              </a:p>
+            </p:txBody>
+          </p:sp>
+        </mc:Fallback>
+      </mc:AlternateContent>
+      <p:sp>
+        <p:nvSpPr>
+          <p:cNvPr id="6" name="TextBox 5">
+            <a:extLst>
+              <a:ext uri="{FF2B5EF4-FFF2-40B4-BE49-F238E27FC236}">
+                <a16:creationId xmlns:a16="http://schemas.microsoft.com/office/drawing/2014/main" id="{963673CC-4DF0-A32C-46AE-BEA67B53BD6D}"/>
+              </a:ext>
+            </a:extLst>
+          </p:cNvPr>
+          <p:cNvSpPr txBox="1"/>
           <p:nvPr/>
         </p:nvSpPr>
         <p:spPr>
           <a:xfrm>
-            <a:off x="4537076" y="1733550"/>
-            <a:ext cx="2457449" cy="1974850"/>
-          </a:xfrm>
-          <a:prstGeom prst="rect">
-            <a:avLst/>
-          </a:prstGeom>
-          <a:solidFill>
-            <a:schemeClr val="bg1"/>
-          </a:solidFill>
-          <a:ln>
-            <a:noFill/>
-          </a:ln>
-        </p:spPr>
-        <p:style>
-          <a:lnRef idx="2">
-            <a:schemeClr val="accent1">
-              <a:shade val="15000"/>
-            </a:schemeClr>
-          </a:lnRef>
-          <a:fillRef idx="1">
-            <a:schemeClr val="accent1"/>
-          </a:fillRef>
-          <a:effectRef idx="0">
-            <a:schemeClr val="accent1"/>
-          </a:effectRef>
-          <a:fontRef idx="minor">
-            <a:schemeClr val="lt1"/>
-          </a:fontRef>
-        </p:style>
-        <p:txBody>
-          <a:bodyPr rtlCol="0" anchor="ctr"/>
-          <a:lstStyle/>
-          <a:p>
-            <a:pPr algn="ctr"/>
-            <a:endParaRPr lang="en-US"/>
-          </a:p>
-        </p:txBody>
-      </p:sp>
-      <p:sp>
-        <p:nvSpPr>
-          <p:cNvPr id="194" name="Rectangle 193">
-            <a:extLst>
-              <a:ext uri="{FF2B5EF4-FFF2-40B4-BE49-F238E27FC236}">
-                <a16:creationId xmlns:a16="http://schemas.microsoft.com/office/drawing/2014/main" id="{4E46CEB5-A81D-2C5E-BB5E-4813840D3364}"/>
-              </a:ext>
-            </a:extLst>
-          </p:cNvPr>
-          <p:cNvSpPr/>
-          <p:nvPr/>
-        </p:nvSpPr>
-        <p:spPr>
-          <a:xfrm>
-            <a:off x="4818888" y="1778460"/>
-            <a:ext cx="1866910" cy="1869280"/>
-          </a:xfrm>
-          <a:prstGeom prst="rect">
-            <a:avLst/>
-          </a:prstGeom>
-          <a:noFill/>
-          <a:ln w="12700">
-            <a:prstDash val="dash"/>
-          </a:ln>
-        </p:spPr>
-        <p:style>
-          <a:lnRef idx="2">
-            <a:schemeClr val="accent1">
-              <a:shade val="15000"/>
-            </a:schemeClr>
-          </a:lnRef>
-          <a:fillRef idx="1">
-            <a:schemeClr val="accent1"/>
-          </a:fillRef>
-          <a:effectRef idx="0">
-            <a:schemeClr val="accent1"/>
-          </a:effectRef>
-          <a:fontRef idx="minor">
-            <a:schemeClr val="lt1"/>
-          </a:fontRef>
-        </p:style>
-        <p:txBody>
-          <a:bodyPr rtlCol="0" anchor="ctr"/>
-          <a:lstStyle/>
-          <a:p>
-            <a:pPr algn="ctr"/>
-            <a:endParaRPr lang="en-US" sz="1200"/>
-          </a:p>
-        </p:txBody>
-      </p:sp>
-      <p:sp>
-        <p:nvSpPr>
-          <p:cNvPr id="195" name="TextBox 194">
-            <a:extLst>
-              <a:ext uri="{FF2B5EF4-FFF2-40B4-BE49-F238E27FC236}">
-                <a16:creationId xmlns:a16="http://schemas.microsoft.com/office/drawing/2014/main" id="{65953A62-29FA-7796-FB40-0D0417D3D2CD}"/>
-              </a:ext>
-            </a:extLst>
-          </p:cNvPr>
-          <p:cNvSpPr txBox="1"/>
-          <p:nvPr/>
-        </p:nvSpPr>
-        <p:spPr>
-          <a:xfrm>
-            <a:off x="4815026" y="1779146"/>
-            <a:ext cx="1733583" cy="276999"/>
+            <a:off x="1803588" y="105925"/>
+            <a:ext cx="3073400" cy="276999"/>
           </a:xfrm>
           <a:prstGeom prst="rect">
             <a:avLst/>
@@ -3453,17 +3474,17 @@
           <a:p>
             <a:r>
               <a:rPr lang="en-US" sz="1200" dirty="0"/>
-              <a:t>Chemical Differentiator</a:t>
-            </a:r>
-          </a:p>
-        </p:txBody>
-      </p:sp>
-      <p:sp>
-        <p:nvSpPr>
-          <p:cNvPr id="196" name="Oval 195">
-            <a:extLst>
-              <a:ext uri="{FF2B5EF4-FFF2-40B4-BE49-F238E27FC236}">
-                <a16:creationId xmlns:a16="http://schemas.microsoft.com/office/drawing/2014/main" id="{ED582031-604C-6F12-0CFF-F0E6781A2848}"/>
+              <a:t>Chemical Differentiator 1 (inverted polarity)</a:t>
+            </a:r>
+          </a:p>
+        </p:txBody>
+      </p:sp>
+      <p:sp>
+        <p:nvSpPr>
+          <p:cNvPr id="7" name="Oval 6">
+            <a:extLst>
+              <a:ext uri="{FF2B5EF4-FFF2-40B4-BE49-F238E27FC236}">
+                <a16:creationId xmlns:a16="http://schemas.microsoft.com/office/drawing/2014/main" id="{6BBE6F9A-BFD0-C6D2-CB4A-2854B7313F52}"/>
               </a:ext>
             </a:extLst>
           </p:cNvPr>
@@ -3474,7 +3495,7 @@
         </p:nvSpPr>
         <p:spPr>
           <a:xfrm>
-            <a:off x="5135363" y="2150483"/>
+            <a:off x="2391801" y="681261"/>
             <a:ext cx="274319" cy="274320"/>
           </a:xfrm>
           <a:prstGeom prst="ellipse">
@@ -3509,10 +3530,10 @@
       </p:sp>
       <p:sp>
         <p:nvSpPr>
-          <p:cNvPr id="197" name="Oval 196">
-            <a:extLst>
-              <a:ext uri="{FF2B5EF4-FFF2-40B4-BE49-F238E27FC236}">
-                <a16:creationId xmlns:a16="http://schemas.microsoft.com/office/drawing/2014/main" id="{3FC4D430-9BB6-73E4-D657-73E76A7180B6}"/>
+          <p:cNvPr id="8" name="Oval 7">
+            <a:extLst>
+              <a:ext uri="{FF2B5EF4-FFF2-40B4-BE49-F238E27FC236}">
+                <a16:creationId xmlns:a16="http://schemas.microsoft.com/office/drawing/2014/main" id="{614EC879-0A92-BBA1-CD35-68005FBB9C31}"/>
               </a:ext>
             </a:extLst>
           </p:cNvPr>
@@ -3523,7 +3544,7 @@
         </p:nvSpPr>
         <p:spPr>
           <a:xfrm>
-            <a:off x="5145708" y="2926577"/>
+            <a:off x="2402146" y="1457355"/>
             <a:ext cx="274319" cy="274320"/>
           </a:xfrm>
           <a:prstGeom prst="ellipse">
@@ -3556,143 +3577,12 @@
           </a:p>
         </p:txBody>
       </p:sp>
-      <mc:AlternateContent xmlns:mc="http://schemas.openxmlformats.org/markup-compatibility/2006">
-        <mc:Choice xmlns:a14="http://schemas.microsoft.com/office/drawing/2010/main" Requires="a14">
-          <p:sp>
-            <p:nvSpPr>
-              <p:cNvPr id="198" name="TextBox 197">
-                <a:extLst>
-                  <a:ext uri="{FF2B5EF4-FFF2-40B4-BE49-F238E27FC236}">
-                    <a16:creationId xmlns:a16="http://schemas.microsoft.com/office/drawing/2014/main" id="{2EE816F7-1401-BC75-D67F-EF9C674FF0D1}"/>
-                  </a:ext>
-                </a:extLst>
-              </p:cNvPr>
-              <p:cNvSpPr txBox="1"/>
-              <p:nvPr/>
-            </p:nvSpPr>
-            <p:spPr>
-              <a:xfrm>
-                <a:off x="5125013" y="2127107"/>
-                <a:ext cx="293275" cy="276999"/>
-              </a:xfrm>
-              <a:prstGeom prst="rect">
-                <a:avLst/>
-              </a:prstGeom>
-              <a:noFill/>
-            </p:spPr>
-            <p:txBody>
-              <a:bodyPr wrap="square">
-                <a:spAutoFit/>
-              </a:bodyPr>
-              <a:lstStyle/>
-              <a:p>
-                <a:pPr/>
-                <a14:m>
-                  <m:oMathPara xmlns:m="http://schemas.openxmlformats.org/officeDocument/2006/math">
-                    <m:oMath>
-                      <m:sSub>
-                        <m:sSubPr>
-                          <m:ctrlPr>
-                            <a:rPr lang="de-DE" sz="1200" i="1">
-                              <a:solidFill>
-                                <a:schemeClr val="bg1"/>
-                              </a:solidFill>
-                              <a:latin typeface="Cambria Math" panose="02040503050406030204" pitchFamily="18" charset="0"/>
-                            </a:rPr>
-                          </m:ctrlPr>
-                        </m:sSubPr>
-                        <m:e>
-                          <m:r>
-                            <m:rPr>
-                              <m:sty m:val="p"/>
-                            </m:rPr>
-                            <a:rPr lang="de-DE" sz="1200" i="1">
-                              <a:solidFill>
-                                <a:schemeClr val="bg1"/>
-                              </a:solidFill>
-                              <a:latin typeface="Cambria Math" panose="02040503050406030204" pitchFamily="18" charset="0"/>
-                            </a:rPr>
-                            <m:t>r</m:t>
-                          </m:r>
-                        </m:e>
-                        <m:sub>
-                          <m:r>
-                            <m:rPr>
-                              <m:sty m:val="p"/>
-                            </m:rPr>
-                            <a:rPr lang="de-DE" sz="1200" i="1">
-                              <a:solidFill>
-                                <a:schemeClr val="bg1"/>
-                              </a:solidFill>
-                              <a:latin typeface="Cambria Math" panose="02040503050406030204" pitchFamily="18" charset="0"/>
-                            </a:rPr>
-                            <m:t>S</m:t>
-                          </m:r>
-                        </m:sub>
-                      </m:sSub>
-                    </m:oMath>
-                  </m:oMathPara>
-                </a14:m>
-                <a:endParaRPr lang="en-US" sz="1200" dirty="0">
-                  <a:solidFill>
-                    <a:schemeClr val="bg1"/>
-                  </a:solidFill>
-                </a:endParaRPr>
-              </a:p>
-            </p:txBody>
-          </p:sp>
-        </mc:Choice>
-        <mc:Fallback>
-          <p:sp>
-            <p:nvSpPr>
-              <p:cNvPr id="198" name="TextBox 197">
-                <a:extLst>
-                  <a:ext uri="{FF2B5EF4-FFF2-40B4-BE49-F238E27FC236}">
-                    <a16:creationId xmlns:a16="http://schemas.microsoft.com/office/drawing/2014/main" id="{2EE816F7-1401-BC75-D67F-EF9C674FF0D1}"/>
-                  </a:ext>
-                </a:extLst>
-              </p:cNvPr>
-              <p:cNvSpPr txBox="1">
-                <a:spLocks noRot="1" noChangeAspect="1" noMove="1" noResize="1" noEditPoints="1" noAdjustHandles="1" noChangeArrowheads="1" noChangeShapeType="1" noTextEdit="1"/>
-              </p:cNvSpPr>
-              <p:nvPr/>
-            </p:nvSpPr>
-            <p:spPr>
-              <a:xfrm>
-                <a:off x="5125013" y="2127107"/>
-                <a:ext cx="293275" cy="276999"/>
-              </a:xfrm>
-              <a:prstGeom prst="rect">
-                <a:avLst/>
-              </a:prstGeom>
-              <a:blipFill>
-                <a:blip r:embed="rId2"/>
-                <a:stretch>
-                  <a:fillRect/>
-                </a:stretch>
-              </a:blipFill>
-            </p:spPr>
-            <p:txBody>
-              <a:bodyPr/>
-              <a:lstStyle/>
-              <a:p>
-                <a:r>
-                  <a:rPr lang="en-US">
-                    <a:noFill/>
-                  </a:rPr>
-                  <a:t> </a:t>
-                </a:r>
-              </a:p>
-            </p:txBody>
-          </p:sp>
-        </mc:Fallback>
-      </mc:AlternateContent>
-      <p:sp>
-        <p:nvSpPr>
-          <p:cNvPr id="199" name="Oval 198">
-            <a:extLst>
-              <a:ext uri="{FF2B5EF4-FFF2-40B4-BE49-F238E27FC236}">
-                <a16:creationId xmlns:a16="http://schemas.microsoft.com/office/drawing/2014/main" id="{F8B284EE-AFA3-81ED-E50E-EA760762F0F4}"/>
+      <p:sp>
+        <p:nvSpPr>
+          <p:cNvPr id="9" name="Oval 8">
+            <a:extLst>
+              <a:ext uri="{FF2B5EF4-FFF2-40B4-BE49-F238E27FC236}">
+                <a16:creationId xmlns:a16="http://schemas.microsoft.com/office/drawing/2014/main" id="{BFC02E14-D59F-DE41-B38E-0411E5047BE0}"/>
               </a:ext>
             </a:extLst>
           </p:cNvPr>
@@ -3703,7 +3593,7 @@
         </p:nvSpPr>
         <p:spPr>
           <a:xfrm>
-            <a:off x="5634478" y="2154251"/>
+            <a:off x="3608457" y="1094499"/>
             <a:ext cx="274319" cy="274320"/>
           </a:xfrm>
           <a:prstGeom prst="ellipse">
@@ -3736,109 +3626,23 @@
           </a:p>
         </p:txBody>
       </p:sp>
-      <p:cxnSp>
-        <p:nvCxnSpPr>
-          <p:cNvPr id="200" name="Straight Arrow Connector 199">
-            <a:extLst>
-              <a:ext uri="{FF2B5EF4-FFF2-40B4-BE49-F238E27FC236}">
-                <a16:creationId xmlns:a16="http://schemas.microsoft.com/office/drawing/2014/main" id="{AD16FFD7-3282-DF26-641E-9874F0D6CC5E}"/>
-              </a:ext>
-            </a:extLst>
-          </p:cNvPr>
-          <p:cNvCxnSpPr>
-            <a:cxnSpLocks/>
-            <a:stCxn id="196" idx="6"/>
-            <a:endCxn id="199" idx="2"/>
-          </p:cNvCxnSpPr>
+      <p:sp>
+        <p:nvSpPr>
+          <p:cNvPr id="10" name="Oval 9">
+            <a:extLst>
+              <a:ext uri="{FF2B5EF4-FFF2-40B4-BE49-F238E27FC236}">
+                <a16:creationId xmlns:a16="http://schemas.microsoft.com/office/drawing/2014/main" id="{7975BB04-6996-67AF-0707-08A812F57E85}"/>
+              </a:ext>
+            </a:extLst>
+          </p:cNvPr>
+          <p:cNvSpPr>
+            <a:spLocks noChangeAspect="1"/>
+          </p:cNvSpPr>
           <p:nvPr/>
-        </p:nvCxnSpPr>
+        </p:nvSpPr>
         <p:spPr>
           <a:xfrm>
-            <a:off x="5409681" y="2287643"/>
-            <a:ext cx="224796" cy="3768"/>
-          </a:xfrm>
-          <a:prstGeom prst="straightConnector1">
-            <a:avLst/>
-          </a:prstGeom>
-          <a:ln w="12700">
-            <a:tailEnd type="triangle" w="med" len="med"/>
-          </a:ln>
-        </p:spPr>
-        <p:style>
-          <a:lnRef idx="2">
-            <a:schemeClr val="accent1"/>
-          </a:lnRef>
-          <a:fillRef idx="0">
-            <a:schemeClr val="accent1"/>
-          </a:fillRef>
-          <a:effectRef idx="1">
-            <a:schemeClr val="accent1"/>
-          </a:effectRef>
-          <a:fontRef idx="minor">
-            <a:schemeClr val="tx1"/>
-          </a:fontRef>
-        </p:style>
-      </p:cxnSp>
-      <p:cxnSp>
-        <p:nvCxnSpPr>
-          <p:cNvPr id="201" name="Straight Arrow Connector 200">
-            <a:extLst>
-              <a:ext uri="{FF2B5EF4-FFF2-40B4-BE49-F238E27FC236}">
-                <a16:creationId xmlns:a16="http://schemas.microsoft.com/office/drawing/2014/main" id="{F9806607-45A4-0977-DB1F-B750F81A39A8}"/>
-              </a:ext>
-            </a:extLst>
-          </p:cNvPr>
-          <p:cNvCxnSpPr>
-            <a:cxnSpLocks/>
-            <a:stCxn id="197" idx="6"/>
-            <a:endCxn id="202" idx="2"/>
-          </p:cNvCxnSpPr>
-          <p:nvPr/>
-        </p:nvCxnSpPr>
-        <p:spPr>
-          <a:xfrm>
-            <a:off x="5420026" y="3063737"/>
-            <a:ext cx="226342" cy="1988"/>
-          </a:xfrm>
-          <a:prstGeom prst="straightConnector1">
-            <a:avLst/>
-          </a:prstGeom>
-          <a:ln w="12700">
-            <a:tailEnd type="triangle" w="med" len="med"/>
-          </a:ln>
-        </p:spPr>
-        <p:style>
-          <a:lnRef idx="2">
-            <a:schemeClr val="accent1"/>
-          </a:lnRef>
-          <a:fillRef idx="0">
-            <a:schemeClr val="accent1"/>
-          </a:fillRef>
-          <a:effectRef idx="1">
-            <a:schemeClr val="accent1"/>
-          </a:effectRef>
-          <a:fontRef idx="minor">
-            <a:schemeClr val="tx1"/>
-          </a:fontRef>
-        </p:style>
-      </p:cxnSp>
-      <p:sp>
-        <p:nvSpPr>
-          <p:cNvPr id="202" name="Oval 201">
-            <a:extLst>
-              <a:ext uri="{FF2B5EF4-FFF2-40B4-BE49-F238E27FC236}">
-                <a16:creationId xmlns:a16="http://schemas.microsoft.com/office/drawing/2014/main" id="{3B38BFB6-CBF8-BDC2-A2B6-F6BC99B13914}"/>
-              </a:ext>
-            </a:extLst>
-          </p:cNvPr>
-          <p:cNvSpPr>
-            <a:spLocks noChangeAspect="1"/>
-          </p:cNvSpPr>
-          <p:nvPr/>
-        </p:nvSpPr>
-        <p:spPr>
-          <a:xfrm>
-            <a:off x="5646369" y="2928565"/>
+            <a:off x="2890916" y="1048782"/>
             <a:ext cx="274319" cy="274320"/>
           </a:xfrm>
           <a:prstGeom prst="ellipse">
@@ -3871,384 +3675,24 @@
           </a:p>
         </p:txBody>
       </p:sp>
-      <mc:AlternateContent xmlns:mc="http://schemas.openxmlformats.org/markup-compatibility/2006">
-        <mc:Choice xmlns:a14="http://schemas.microsoft.com/office/drawing/2010/main" Requires="a14">
-          <p:sp>
-            <p:nvSpPr>
-              <p:cNvPr id="203" name="TextBox 202">
-                <a:extLst>
-                  <a:ext uri="{FF2B5EF4-FFF2-40B4-BE49-F238E27FC236}">
-                    <a16:creationId xmlns:a16="http://schemas.microsoft.com/office/drawing/2014/main" id="{159B90CE-06C9-066A-E497-CA7D8D3CA25C}"/>
-                  </a:ext>
-                </a:extLst>
-              </p:cNvPr>
-              <p:cNvSpPr txBox="1"/>
-              <p:nvPr/>
-            </p:nvSpPr>
-            <p:spPr>
-              <a:xfrm>
-                <a:off x="5124313" y="2911371"/>
-                <a:ext cx="333162" cy="276999"/>
-              </a:xfrm>
-              <a:prstGeom prst="rect">
-                <a:avLst/>
-              </a:prstGeom>
-              <a:noFill/>
-            </p:spPr>
-            <p:txBody>
-              <a:bodyPr wrap="square">
-                <a:spAutoFit/>
-              </a:bodyPr>
-              <a:lstStyle/>
-              <a:p>
-                <a:pPr/>
-                <a14:m>
-                  <m:oMathPara xmlns:m="http://schemas.openxmlformats.org/officeDocument/2006/math">
-                    <m:oMath>
-                      <m:sSub>
-                        <m:sSubPr>
-                          <m:ctrlPr>
-                            <a:rPr lang="de-DE" sz="1200" i="1">
-                              <a:solidFill>
-                                <a:schemeClr val="bg1"/>
-                              </a:solidFill>
-                              <a:latin typeface="Cambria Math" panose="02040503050406030204" pitchFamily="18" charset="0"/>
-                            </a:rPr>
-                          </m:ctrlPr>
-                        </m:sSubPr>
-                        <m:e>
-                          <m:r>
-                            <m:rPr>
-                              <m:sty m:val="p"/>
-                            </m:rPr>
-                            <a:rPr lang="de-DE" sz="1200" i="1">
-                              <a:solidFill>
-                                <a:schemeClr val="bg1"/>
-                              </a:solidFill>
-                              <a:latin typeface="Cambria Math" panose="02040503050406030204" pitchFamily="18" charset="0"/>
-                            </a:rPr>
-                            <m:t>r</m:t>
-                          </m:r>
-                        </m:e>
-                        <m:sub>
-                          <m:r>
-                            <m:rPr>
-                              <m:sty m:val="p"/>
-                            </m:rPr>
-                            <a:rPr lang="de-DE" sz="1200" i="1">
-                              <a:solidFill>
-                                <a:schemeClr val="bg1"/>
-                              </a:solidFill>
-                              <a:latin typeface="Cambria Math" panose="02040503050406030204" pitchFamily="18" charset="0"/>
-                            </a:rPr>
-                            <m:t>F</m:t>
-                          </m:r>
-                        </m:sub>
-                      </m:sSub>
-                    </m:oMath>
-                  </m:oMathPara>
-                </a14:m>
-                <a:endParaRPr lang="en-US" sz="1200" dirty="0">
-                  <a:solidFill>
-                    <a:schemeClr val="bg1"/>
-                  </a:solidFill>
-                </a:endParaRPr>
-              </a:p>
-            </p:txBody>
-          </p:sp>
-        </mc:Choice>
-        <mc:Fallback>
-          <p:sp>
-            <p:nvSpPr>
-              <p:cNvPr id="203" name="TextBox 202">
-                <a:extLst>
-                  <a:ext uri="{FF2B5EF4-FFF2-40B4-BE49-F238E27FC236}">
-                    <a16:creationId xmlns:a16="http://schemas.microsoft.com/office/drawing/2014/main" id="{159B90CE-06C9-066A-E497-CA7D8D3CA25C}"/>
-                  </a:ext>
-                </a:extLst>
-              </p:cNvPr>
-              <p:cNvSpPr txBox="1">
-                <a:spLocks noRot="1" noChangeAspect="1" noMove="1" noResize="1" noEditPoints="1" noAdjustHandles="1" noChangeArrowheads="1" noChangeShapeType="1" noTextEdit="1"/>
-              </p:cNvSpPr>
-              <p:nvPr/>
-            </p:nvSpPr>
-            <p:spPr>
-              <a:xfrm>
-                <a:off x="5124313" y="2911371"/>
-                <a:ext cx="333162" cy="276999"/>
-              </a:xfrm>
-              <a:prstGeom prst="rect">
-                <a:avLst/>
-              </a:prstGeom>
-              <a:blipFill>
-                <a:blip r:embed="rId3"/>
-                <a:stretch>
-                  <a:fillRect/>
-                </a:stretch>
-              </a:blipFill>
-            </p:spPr>
-            <p:txBody>
-              <a:bodyPr/>
-              <a:lstStyle/>
-              <a:p>
-                <a:r>
-                  <a:rPr lang="en-US">
-                    <a:noFill/>
-                  </a:rPr>
-                  <a:t> </a:t>
-                </a:r>
-              </a:p>
-            </p:txBody>
-          </p:sp>
-        </mc:Fallback>
-      </mc:AlternateContent>
-      <p:sp>
-        <p:nvSpPr>
-          <p:cNvPr id="204" name="Oval 203">
-            <a:extLst>
-              <a:ext uri="{FF2B5EF4-FFF2-40B4-BE49-F238E27FC236}">
-                <a16:creationId xmlns:a16="http://schemas.microsoft.com/office/drawing/2014/main" id="{592AD67C-7742-35EB-239F-B4D1C16039A8}"/>
-              </a:ext>
-            </a:extLst>
-          </p:cNvPr>
-          <p:cNvSpPr>
-            <a:spLocks noChangeAspect="1"/>
-          </p:cNvSpPr>
-          <p:nvPr/>
-        </p:nvSpPr>
-        <p:spPr>
-          <a:xfrm>
-            <a:off x="6352019" y="2563721"/>
-            <a:ext cx="274319" cy="274320"/>
-          </a:xfrm>
-          <a:prstGeom prst="ellipse">
-            <a:avLst/>
-          </a:prstGeom>
-          <a:ln w="12700"/>
-        </p:spPr>
-        <p:style>
-          <a:lnRef idx="2">
-            <a:schemeClr val="accent1">
-              <a:shade val="15000"/>
-            </a:schemeClr>
-          </a:lnRef>
-          <a:fillRef idx="1">
-            <a:schemeClr val="accent1"/>
-          </a:fillRef>
-          <a:effectRef idx="0">
-            <a:schemeClr val="accent1"/>
-          </a:effectRef>
-          <a:fontRef idx="minor">
-            <a:schemeClr val="lt1"/>
-          </a:fontRef>
-        </p:style>
-        <p:txBody>
-          <a:bodyPr rtlCol="0" anchor="ctr"/>
-          <a:lstStyle/>
-          <a:p>
-            <a:pPr algn="ctr"/>
-            <a:endParaRPr lang="en-US" sz="1200"/>
-          </a:p>
-        </p:txBody>
-      </p:sp>
-      <mc:AlternateContent xmlns:mc="http://schemas.openxmlformats.org/markup-compatibility/2006">
-        <mc:Choice xmlns:a14="http://schemas.microsoft.com/office/drawing/2010/main" Requires="a14">
-          <p:sp>
-            <p:nvSpPr>
-              <p:cNvPr id="205" name="TextBox 204">
-                <a:extLst>
-                  <a:ext uri="{FF2B5EF4-FFF2-40B4-BE49-F238E27FC236}">
-                    <a16:creationId xmlns:a16="http://schemas.microsoft.com/office/drawing/2014/main" id="{E2CE2C88-6E9E-8472-460F-FD18413DF8A6}"/>
-                  </a:ext>
-                </a:extLst>
-              </p:cNvPr>
-              <p:cNvSpPr txBox="1"/>
-              <p:nvPr/>
-            </p:nvSpPr>
-            <p:spPr>
-              <a:xfrm>
-                <a:off x="5592789" y="2127106"/>
-                <a:ext cx="289008" cy="294504"/>
-              </a:xfrm>
-              <a:prstGeom prst="rect">
-                <a:avLst/>
-              </a:prstGeom>
-              <a:noFill/>
-            </p:spPr>
-            <p:txBody>
-              <a:bodyPr wrap="square">
-                <a:spAutoFit/>
-              </a:bodyPr>
-              <a:lstStyle/>
-              <a:p>
-                <a:pPr/>
-                <a14:m>
-                  <m:oMathPara xmlns:m="http://schemas.openxmlformats.org/officeDocument/2006/math">
-                    <m:oMath>
-                      <m:sSub>
-                        <m:sSubPr>
-                          <m:ctrlPr>
-                            <a:rPr lang="de-DE" sz="1200" i="1">
-                              <a:solidFill>
-                                <a:schemeClr val="bg1"/>
-                              </a:solidFill>
-                              <a:latin typeface="Cambria Math" panose="02040503050406030204" pitchFamily="18" charset="0"/>
-                            </a:rPr>
-                          </m:ctrlPr>
-                        </m:sSubPr>
-                        <m:e>
-                          <m:r>
-                            <m:rPr>
-                              <m:sty m:val="p"/>
-                            </m:rPr>
-                            <a:rPr lang="de-DE" sz="1200" i="1">
-                              <a:solidFill>
-                                <a:schemeClr val="bg1"/>
-                              </a:solidFill>
-                              <a:latin typeface="Cambria Math" panose="02040503050406030204" pitchFamily="18" charset="0"/>
-                            </a:rPr>
-                            <m:t>r</m:t>
-                          </m:r>
-                        </m:e>
-                        <m:sub>
-                          <m:r>
-                            <m:rPr>
-                              <m:sty m:val="p"/>
-                            </m:rPr>
-                            <a:rPr lang="en-GB" sz="1200" i="1">
-                              <a:solidFill>
-                                <a:schemeClr val="bg1"/>
-                              </a:solidFill>
-                              <a:latin typeface="Cambria Math" panose="02040503050406030204" pitchFamily="18" charset="0"/>
-                            </a:rPr>
-                            <m:t>Sg</m:t>
-                          </m:r>
-                        </m:sub>
-                      </m:sSub>
-                    </m:oMath>
-                  </m:oMathPara>
-                </a14:m>
-                <a:endParaRPr lang="en-US" sz="1200" dirty="0">
-                  <a:solidFill>
-                    <a:schemeClr val="bg1"/>
-                  </a:solidFill>
-                </a:endParaRPr>
-              </a:p>
-            </p:txBody>
-          </p:sp>
-        </mc:Choice>
-        <mc:Fallback>
-          <p:sp>
-            <p:nvSpPr>
-              <p:cNvPr id="205" name="TextBox 204">
-                <a:extLst>
-                  <a:ext uri="{FF2B5EF4-FFF2-40B4-BE49-F238E27FC236}">
-                    <a16:creationId xmlns:a16="http://schemas.microsoft.com/office/drawing/2014/main" id="{E2CE2C88-6E9E-8472-460F-FD18413DF8A6}"/>
-                  </a:ext>
-                </a:extLst>
-              </p:cNvPr>
-              <p:cNvSpPr txBox="1">
-                <a:spLocks noRot="1" noChangeAspect="1" noMove="1" noResize="1" noEditPoints="1" noAdjustHandles="1" noChangeArrowheads="1" noChangeShapeType="1" noTextEdit="1"/>
-              </p:cNvSpPr>
-              <p:nvPr/>
-            </p:nvSpPr>
-            <p:spPr>
-              <a:xfrm>
-                <a:off x="5592789" y="2127106"/>
-                <a:ext cx="289008" cy="294504"/>
-              </a:xfrm>
-              <a:prstGeom prst="rect">
-                <a:avLst/>
-              </a:prstGeom>
-              <a:blipFill>
-                <a:blip r:embed="rId4"/>
-                <a:stretch>
-                  <a:fillRect r="-12500" b="-2083"/>
-                </a:stretch>
-              </a:blipFill>
-            </p:spPr>
-            <p:txBody>
-              <a:bodyPr/>
-              <a:lstStyle/>
-              <a:p>
-                <a:r>
-                  <a:rPr lang="en-US">
-                    <a:noFill/>
-                  </a:rPr>
-                  <a:t> </a:t>
-                </a:r>
-              </a:p>
-            </p:txBody>
-          </p:sp>
-        </mc:Fallback>
-      </mc:AlternateContent>
-      <p:sp>
-        <p:nvSpPr>
-          <p:cNvPr id="206" name="Oval 205">
-            <a:extLst>
-              <a:ext uri="{FF2B5EF4-FFF2-40B4-BE49-F238E27FC236}">
-                <a16:creationId xmlns:a16="http://schemas.microsoft.com/office/drawing/2014/main" id="{2A9718C4-342F-0BA4-B446-7C1498D021C0}"/>
-              </a:ext>
-            </a:extLst>
-          </p:cNvPr>
-          <p:cNvSpPr>
-            <a:spLocks noChangeAspect="1"/>
-          </p:cNvSpPr>
-          <p:nvPr/>
-        </p:nvSpPr>
-        <p:spPr>
-          <a:xfrm>
-            <a:off x="5634478" y="2518004"/>
-            <a:ext cx="274319" cy="274320"/>
-          </a:xfrm>
-          <a:prstGeom prst="ellipse">
-            <a:avLst/>
-          </a:prstGeom>
-          <a:ln w="12700"/>
-        </p:spPr>
-        <p:style>
-          <a:lnRef idx="2">
-            <a:schemeClr val="accent1">
-              <a:shade val="15000"/>
-            </a:schemeClr>
-          </a:lnRef>
-          <a:fillRef idx="1">
-            <a:schemeClr val="accent1"/>
-          </a:fillRef>
-          <a:effectRef idx="0">
-            <a:schemeClr val="accent1"/>
-          </a:effectRef>
-          <a:fontRef idx="minor">
-            <a:schemeClr val="lt1"/>
-          </a:fontRef>
-        </p:style>
-        <p:txBody>
-          <a:bodyPr rtlCol="0" anchor="ctr"/>
-          <a:lstStyle/>
-          <a:p>
-            <a:pPr algn="ctr"/>
-            <a:endParaRPr lang="en-US" sz="1200"/>
-          </a:p>
-        </p:txBody>
-      </p:sp>
       <p:cxnSp>
         <p:nvCxnSpPr>
-          <p:cNvPr id="207" name="Connector: Elbow 206">
-            <a:extLst>
-              <a:ext uri="{FF2B5EF4-FFF2-40B4-BE49-F238E27FC236}">
-                <a16:creationId xmlns:a16="http://schemas.microsoft.com/office/drawing/2014/main" id="{211B781D-F98E-8628-C43B-2C73B1F19E3E}"/>
+          <p:cNvPr id="11" name="Connector: Elbow 10">
+            <a:extLst>
+              <a:ext uri="{FF2B5EF4-FFF2-40B4-BE49-F238E27FC236}">
+                <a16:creationId xmlns:a16="http://schemas.microsoft.com/office/drawing/2014/main" id="{C2D8F963-69BB-B1AB-2233-C827C006B3B2}"/>
               </a:ext>
             </a:extLst>
           </p:cNvPr>
           <p:cNvCxnSpPr>
             <a:cxnSpLocks/>
-            <a:endCxn id="206" idx="2"/>
+            <a:endCxn id="10" idx="2"/>
           </p:cNvCxnSpPr>
           <p:nvPr/>
         </p:nvCxnSpPr>
         <p:spPr>
           <a:xfrm rot="16200000" flipH="1">
-            <a:off x="5385012" y="2405698"/>
+            <a:off x="2641450" y="936478"/>
             <a:ext cx="367481" cy="131451"/>
           </a:xfrm>
           <a:prstGeom prst="bentConnector2">
@@ -4273,14 +3717,14 @@
           </a:fontRef>
         </p:style>
       </p:cxnSp>
-      <mc:AlternateContent xmlns:mc="http://schemas.openxmlformats.org/markup-compatibility/2006">
-        <mc:Choice xmlns:a14="http://schemas.microsoft.com/office/drawing/2010/main" Requires="a14">
+      <mc:AlternateContent xmlns:mc="http://schemas.openxmlformats.org/markup-compatibility/2006" xmlns:a14="http://schemas.microsoft.com/office/drawing/2010/main">
+        <mc:Choice Requires="a14">
           <p:sp>
             <p:nvSpPr>
-              <p:cNvPr id="208" name="TextBox 207">
+              <p:cNvPr id="12" name="TextBox 11">
                 <a:extLst>
                   <a:ext uri="{FF2B5EF4-FFF2-40B4-BE49-F238E27FC236}">
-                    <a16:creationId xmlns:a16="http://schemas.microsoft.com/office/drawing/2014/main" id="{75C681AF-A0A0-00CD-509C-27587E8E2909}"/>
+                    <a16:creationId xmlns:a16="http://schemas.microsoft.com/office/drawing/2014/main" id="{5A45E957-1B06-40EF-8B26-D36D7D303773}"/>
                   </a:ext>
                 </a:extLst>
               </p:cNvPr>
@@ -4289,7 +3733,7 @@
             </p:nvSpPr>
             <p:spPr>
               <a:xfrm>
-                <a:off x="5592789" y="2490860"/>
+                <a:off x="2849225" y="1021640"/>
                 <a:ext cx="289008" cy="276999"/>
               </a:xfrm>
               <a:prstGeom prst="rect">
@@ -4337,13 +3781,25 @@
                             <m:rPr>
                               <m:sty m:val="p"/>
                             </m:rPr>
-                            <a:rPr lang="en-GB" sz="1200" i="1">
+                            <a:rPr lang="es-ES" sz="1200" i="1">
                               <a:solidFill>
                                 <a:schemeClr val="bg1"/>
                               </a:solidFill>
                               <a:latin typeface="Cambria Math" panose="02040503050406030204" pitchFamily="18" charset="0"/>
                             </a:rPr>
-                            <m:t>Ss</m:t>
+                            <m:t>F</m:t>
+                          </m:r>
+                          <m:r>
+                            <m:rPr>
+                              <m:sty m:val="p"/>
+                            </m:rPr>
+                            <a:rPr lang="de-DE" sz="1200" b="0" i="1" smtClean="0">
+                              <a:solidFill>
+                                <a:schemeClr val="bg1"/>
+                              </a:solidFill>
+                              <a:latin typeface="Cambria Math" panose="02040503050406030204" pitchFamily="18" charset="0"/>
+                            </a:rPr>
+                            <m:t>r</m:t>
                           </m:r>
                         </m:sub>
                       </m:sSub>
@@ -4359,13 +3815,13 @@
             </p:txBody>
           </p:sp>
         </mc:Choice>
-        <mc:Fallback>
+        <mc:Fallback xmlns="">
           <p:sp>
             <p:nvSpPr>
-              <p:cNvPr id="208" name="TextBox 207">
+              <p:cNvPr id="12" name="TextBox 11">
                 <a:extLst>
                   <a:ext uri="{FF2B5EF4-FFF2-40B4-BE49-F238E27FC236}">
-                    <a16:creationId xmlns:a16="http://schemas.microsoft.com/office/drawing/2014/main" id="{75C681AF-A0A0-00CD-509C-27587E8E2909}"/>
+                    <a16:creationId xmlns:a16="http://schemas.microsoft.com/office/drawing/2014/main" id="{5A45E957-1B06-40EF-8B26-D36D7D303773}"/>
                   </a:ext>
                 </a:extLst>
               </p:cNvPr>
@@ -4376,16 +3832,16 @@
             </p:nvSpPr>
             <p:spPr>
               <a:xfrm>
-                <a:off x="5592789" y="2490860"/>
+                <a:off x="2849225" y="1021640"/>
                 <a:ext cx="289008" cy="276999"/>
               </a:xfrm>
               <a:prstGeom prst="rect">
                 <a:avLst/>
               </a:prstGeom>
               <a:blipFill>
-                <a:blip r:embed="rId5"/>
+                <a:blip r:embed="rId3"/>
                 <a:stretch>
-                  <a:fillRect r="-6250"/>
+                  <a:fillRect r="-2083"/>
                 </a:stretch>
               </a:blipFill>
             </p:spPr>
@@ -4406,22 +3862,22 @@
       </mc:AlternateContent>
       <p:cxnSp>
         <p:nvCxnSpPr>
-          <p:cNvPr id="209" name="Straight Arrow Connector 208">
-            <a:extLst>
-              <a:ext uri="{FF2B5EF4-FFF2-40B4-BE49-F238E27FC236}">
-                <a16:creationId xmlns:a16="http://schemas.microsoft.com/office/drawing/2014/main" id="{755C2202-1446-E68D-EA01-34A260D5657B}"/>
+          <p:cNvPr id="13" name="Straight Arrow Connector 12">
+            <a:extLst>
+              <a:ext uri="{FF2B5EF4-FFF2-40B4-BE49-F238E27FC236}">
+                <a16:creationId xmlns:a16="http://schemas.microsoft.com/office/drawing/2014/main" id="{30BD136F-5BC3-6EE4-D13E-51A3F04C67B8}"/>
               </a:ext>
             </a:extLst>
           </p:cNvPr>
           <p:cNvCxnSpPr>
             <a:cxnSpLocks/>
-            <a:stCxn id="206" idx="6"/>
+            <a:stCxn id="10" idx="6"/>
           </p:cNvCxnSpPr>
           <p:nvPr/>
         </p:nvCxnSpPr>
         <p:spPr>
           <a:xfrm>
-            <a:off x="5908797" y="2655164"/>
+            <a:off x="3165235" y="1185942"/>
             <a:ext cx="175053" cy="0"/>
           </a:xfrm>
           <a:prstGeom prst="straightConnector1">
@@ -4446,14 +3902,14 @@
           </a:fontRef>
         </p:style>
       </p:cxnSp>
-      <mc:AlternateContent xmlns:mc="http://schemas.openxmlformats.org/markup-compatibility/2006">
-        <mc:Choice xmlns:a14="http://schemas.microsoft.com/office/drawing/2010/main" Requires="a14">
+      <mc:AlternateContent xmlns:mc="http://schemas.openxmlformats.org/markup-compatibility/2006" xmlns:a14="http://schemas.microsoft.com/office/drawing/2010/main">
+        <mc:Choice Requires="a14">
           <p:sp>
             <p:nvSpPr>
-              <p:cNvPr id="210" name="TextBox 209">
+              <p:cNvPr id="14" name="TextBox 13">
                 <a:extLst>
                   <a:ext uri="{FF2B5EF4-FFF2-40B4-BE49-F238E27FC236}">
-                    <a16:creationId xmlns:a16="http://schemas.microsoft.com/office/drawing/2014/main" id="{BCB2D07F-7414-A0EA-290C-8F6F2973DC83}"/>
+                    <a16:creationId xmlns:a16="http://schemas.microsoft.com/office/drawing/2014/main" id="{E6E91410-00F2-8C3B-4793-9A951CBC10B2}"/>
                   </a:ext>
                 </a:extLst>
               </p:cNvPr>
@@ -4462,7 +3918,7 @@
             </p:nvSpPr>
             <p:spPr>
               <a:xfrm>
-                <a:off x="6092939" y="2557447"/>
+                <a:off x="3349375" y="1088225"/>
                 <a:ext cx="128240" cy="184666"/>
               </a:xfrm>
               <a:prstGeom prst="rect">
@@ -4476,6 +3932,7 @@
               </a:bodyPr>
               <a:lstStyle/>
               <a:p>
+                <a:pPr/>
                 <a14:m>
                   <m:oMathPara xmlns:m="http://schemas.openxmlformats.org/officeDocument/2006/math">
                     <m:oMath>
@@ -4494,13 +3951,13 @@
             </p:txBody>
           </p:sp>
         </mc:Choice>
-        <mc:Fallback>
+        <mc:Fallback xmlns="">
           <p:sp>
             <p:nvSpPr>
-              <p:cNvPr id="210" name="TextBox 209">
+              <p:cNvPr id="14" name="TextBox 13">
                 <a:extLst>
                   <a:ext uri="{FF2B5EF4-FFF2-40B4-BE49-F238E27FC236}">
-                    <a16:creationId xmlns:a16="http://schemas.microsoft.com/office/drawing/2014/main" id="{BCB2D07F-7414-A0EA-290C-8F6F2973DC83}"/>
+                    <a16:creationId xmlns:a16="http://schemas.microsoft.com/office/drawing/2014/main" id="{E6E91410-00F2-8C3B-4793-9A951CBC10B2}"/>
                   </a:ext>
                 </a:extLst>
               </p:cNvPr>
@@ -4511,16 +3968,16 @@
             </p:nvSpPr>
             <p:spPr>
               <a:xfrm>
-                <a:off x="6092939" y="2557447"/>
+                <a:off x="3349375" y="1088225"/>
                 <a:ext cx="128240" cy="184666"/>
               </a:xfrm>
               <a:prstGeom prst="rect">
                 <a:avLst/>
               </a:prstGeom>
               <a:blipFill>
-                <a:blip r:embed="rId6"/>
+                <a:blip r:embed="rId4"/>
                 <a:stretch>
-                  <a:fillRect l="-31818" t="-3333" r="-36364" b="-16667"/>
+                  <a:fillRect l="-33333" t="-3333" r="-42857" b="-16667"/>
                 </a:stretch>
               </a:blipFill>
             </p:spPr>
@@ -4541,24 +3998,24 @@
       </mc:AlternateContent>
       <p:cxnSp>
         <p:nvCxnSpPr>
-          <p:cNvPr id="211" name="Connector: Elbow 210">
-            <a:extLst>
-              <a:ext uri="{FF2B5EF4-FFF2-40B4-BE49-F238E27FC236}">
-                <a16:creationId xmlns:a16="http://schemas.microsoft.com/office/drawing/2014/main" id="{7A137C1C-C8CE-AC84-AD1D-DCAF38B7EECB}"/>
+          <p:cNvPr id="15" name="Connector: Elbow 14">
+            <a:extLst>
+              <a:ext uri="{FF2B5EF4-FFF2-40B4-BE49-F238E27FC236}">
+                <a16:creationId xmlns:a16="http://schemas.microsoft.com/office/drawing/2014/main" id="{B9632D20-5C0A-2491-E2F2-FE73DE0A91E8}"/>
               </a:ext>
             </a:extLst>
           </p:cNvPr>
           <p:cNvCxnSpPr>
             <a:cxnSpLocks/>
-            <a:stCxn id="199" idx="6"/>
-            <a:endCxn id="204" idx="0"/>
+            <a:stCxn id="7" idx="6"/>
+            <a:endCxn id="9" idx="0"/>
           </p:cNvCxnSpPr>
           <p:nvPr/>
         </p:nvCxnSpPr>
         <p:spPr>
           <a:xfrm>
-            <a:off x="5908796" y="2291411"/>
-            <a:ext cx="580382" cy="272310"/>
+            <a:off x="2666120" y="818421"/>
+            <a:ext cx="1079497" cy="276078"/>
           </a:xfrm>
           <a:prstGeom prst="bentConnector2">
             <a:avLst/>
@@ -4582,56 +4039,14 @@
           </a:fontRef>
         </p:style>
       </p:cxnSp>
-      <p:cxnSp>
-        <p:nvCxnSpPr>
-          <p:cNvPr id="212" name="Connector: Elbow 211">
-            <a:extLst>
-              <a:ext uri="{FF2B5EF4-FFF2-40B4-BE49-F238E27FC236}">
-                <a16:creationId xmlns:a16="http://schemas.microsoft.com/office/drawing/2014/main" id="{86904B19-A11D-847B-2197-7B820EC9DFE8}"/>
-              </a:ext>
-            </a:extLst>
-          </p:cNvPr>
-          <p:cNvCxnSpPr>
-            <a:cxnSpLocks/>
-            <a:stCxn id="202" idx="6"/>
-          </p:cNvCxnSpPr>
-          <p:nvPr/>
-        </p:nvCxnSpPr>
-        <p:spPr>
-          <a:xfrm flipV="1">
-            <a:off x="5920688" y="2831777"/>
-            <a:ext cx="574831" cy="233948"/>
-          </a:xfrm>
-          <a:prstGeom prst="bentConnector2">
-            <a:avLst/>
-          </a:prstGeom>
-          <a:ln w="12700">
-            <a:tailEnd type="triangle"/>
-          </a:ln>
-        </p:spPr>
-        <p:style>
-          <a:lnRef idx="2">
-            <a:schemeClr val="accent1"/>
-          </a:lnRef>
-          <a:fillRef idx="0">
-            <a:schemeClr val="accent1"/>
-          </a:fillRef>
-          <a:effectRef idx="1">
-            <a:schemeClr val="accent1"/>
-          </a:effectRef>
-          <a:fontRef idx="minor">
-            <a:schemeClr val="tx1"/>
-          </a:fontRef>
-        </p:style>
-      </p:cxnSp>
-      <mc:AlternateContent xmlns:mc="http://schemas.openxmlformats.org/markup-compatibility/2006">
-        <mc:Choice xmlns:a14="http://schemas.microsoft.com/office/drawing/2010/main" Requires="a14">
+      <mc:AlternateContent xmlns:mc="http://schemas.openxmlformats.org/markup-compatibility/2006" xmlns:a14="http://schemas.microsoft.com/office/drawing/2010/main">
+        <mc:Choice Requires="a14">
           <p:sp>
             <p:nvSpPr>
-              <p:cNvPr id="213" name="TextBox 212">
+              <p:cNvPr id="16" name="TextBox 15">
                 <a:extLst>
                   <a:ext uri="{FF2B5EF4-FFF2-40B4-BE49-F238E27FC236}">
-                    <a16:creationId xmlns:a16="http://schemas.microsoft.com/office/drawing/2014/main" id="{26EA0340-F92D-43D7-C333-A9F747DEF33C}"/>
+                    <a16:creationId xmlns:a16="http://schemas.microsoft.com/office/drawing/2014/main" id="{7B2CCE0B-996B-03D8-3FD1-666EE7F3861C}"/>
                   </a:ext>
                 </a:extLst>
               </p:cNvPr>
@@ -4640,713 +4055,7 @@
             </p:nvSpPr>
             <p:spPr>
               <a:xfrm>
-                <a:off x="5615328" y="2898457"/>
-                <a:ext cx="349080" cy="294504"/>
-              </a:xfrm>
-              <a:prstGeom prst="rect">
-                <a:avLst/>
-              </a:prstGeom>
-              <a:noFill/>
-            </p:spPr>
-            <p:txBody>
-              <a:bodyPr wrap="square">
-                <a:spAutoFit/>
-              </a:bodyPr>
-              <a:lstStyle/>
-              <a:p>
-                <a:pPr/>
-                <a14:m>
-                  <m:oMathPara xmlns:m="http://schemas.openxmlformats.org/officeDocument/2006/math">
-                    <m:oMath>
-                      <m:sSub>
-                        <m:sSubPr>
-                          <m:ctrlPr>
-                            <a:rPr lang="de-DE" sz="1200" i="1">
-                              <a:solidFill>
-                                <a:schemeClr val="bg1"/>
-                              </a:solidFill>
-                              <a:latin typeface="Cambria Math" panose="02040503050406030204" pitchFamily="18" charset="0"/>
-                            </a:rPr>
-                          </m:ctrlPr>
-                        </m:sSubPr>
-                        <m:e>
-                          <m:r>
-                            <m:rPr>
-                              <m:sty m:val="p"/>
-                            </m:rPr>
-                            <a:rPr lang="de-DE" sz="1200" i="1">
-                              <a:solidFill>
-                                <a:schemeClr val="bg1"/>
-                              </a:solidFill>
-                              <a:latin typeface="Cambria Math" panose="02040503050406030204" pitchFamily="18" charset="0"/>
-                            </a:rPr>
-                            <m:t>r</m:t>
-                          </m:r>
-                        </m:e>
-                        <m:sub>
-                          <m:r>
-                            <m:rPr>
-                              <m:sty m:val="p"/>
-                            </m:rPr>
-                            <a:rPr lang="en-GB" sz="1200" i="1">
-                              <a:solidFill>
-                                <a:schemeClr val="bg1"/>
-                              </a:solidFill>
-                              <a:latin typeface="Cambria Math" panose="02040503050406030204" pitchFamily="18" charset="0"/>
-                            </a:rPr>
-                            <m:t>Fg</m:t>
-                          </m:r>
-                        </m:sub>
-                      </m:sSub>
-                    </m:oMath>
-                  </m:oMathPara>
-                </a14:m>
-                <a:endParaRPr lang="en-US" sz="1200" dirty="0">
-                  <a:solidFill>
-                    <a:schemeClr val="bg1"/>
-                  </a:solidFill>
-                </a:endParaRPr>
-              </a:p>
-            </p:txBody>
-          </p:sp>
-        </mc:Choice>
-        <mc:Fallback>
-          <p:sp>
-            <p:nvSpPr>
-              <p:cNvPr id="213" name="TextBox 212">
-                <a:extLst>
-                  <a:ext uri="{FF2B5EF4-FFF2-40B4-BE49-F238E27FC236}">
-                    <a16:creationId xmlns:a16="http://schemas.microsoft.com/office/drawing/2014/main" id="{26EA0340-F92D-43D7-C333-A9F747DEF33C}"/>
-                  </a:ext>
-                </a:extLst>
-              </p:cNvPr>
-              <p:cNvSpPr txBox="1">
-                <a:spLocks noRot="1" noChangeAspect="1" noMove="1" noResize="1" noEditPoints="1" noAdjustHandles="1" noChangeArrowheads="1" noChangeShapeType="1" noTextEdit="1"/>
-              </p:cNvSpPr>
-              <p:nvPr/>
-            </p:nvSpPr>
-            <p:spPr>
-              <a:xfrm>
-                <a:off x="5615328" y="2898457"/>
-                <a:ext cx="349080" cy="294504"/>
-              </a:xfrm>
-              <a:prstGeom prst="rect">
-                <a:avLst/>
-              </a:prstGeom>
-              <a:blipFill>
-                <a:blip r:embed="rId7"/>
-                <a:stretch>
-                  <a:fillRect/>
-                </a:stretch>
-              </a:blipFill>
-            </p:spPr>
-            <p:txBody>
-              <a:bodyPr/>
-              <a:lstStyle/>
-              <a:p>
-                <a:r>
-                  <a:rPr lang="en-US">
-                    <a:noFill/>
-                  </a:rPr>
-                  <a:t> </a:t>
-                </a:r>
-              </a:p>
-            </p:txBody>
-          </p:sp>
-        </mc:Fallback>
-      </mc:AlternateContent>
-      <p:sp>
-        <p:nvSpPr>
-          <p:cNvPr id="214" name="Oval 213">
-            <a:extLst>
-              <a:ext uri="{FF2B5EF4-FFF2-40B4-BE49-F238E27FC236}">
-                <a16:creationId xmlns:a16="http://schemas.microsoft.com/office/drawing/2014/main" id="{BAD919B9-8C9B-643A-5510-3D6BB5E74577}"/>
-              </a:ext>
-            </a:extLst>
-          </p:cNvPr>
-          <p:cNvSpPr>
-            <a:spLocks noChangeAspect="1"/>
-          </p:cNvSpPr>
-          <p:nvPr/>
-        </p:nvSpPr>
-        <p:spPr>
-          <a:xfrm>
-            <a:off x="5637539" y="3297224"/>
-            <a:ext cx="274319" cy="274320"/>
-          </a:xfrm>
-          <a:prstGeom prst="ellipse">
-            <a:avLst/>
-          </a:prstGeom>
-          <a:ln w="12700"/>
-        </p:spPr>
-        <p:style>
-          <a:lnRef idx="2">
-            <a:schemeClr val="accent1">
-              <a:shade val="15000"/>
-            </a:schemeClr>
-          </a:lnRef>
-          <a:fillRef idx="1">
-            <a:schemeClr val="accent1"/>
-          </a:fillRef>
-          <a:effectRef idx="0">
-            <a:schemeClr val="accent1"/>
-          </a:effectRef>
-          <a:fontRef idx="minor">
-            <a:schemeClr val="lt1"/>
-          </a:fontRef>
-        </p:style>
-        <p:txBody>
-          <a:bodyPr rtlCol="0" anchor="ctr"/>
-          <a:lstStyle/>
-          <a:p>
-            <a:pPr algn="ctr"/>
-            <a:endParaRPr lang="en-US" sz="1200"/>
-          </a:p>
-        </p:txBody>
-      </p:sp>
-      <p:cxnSp>
-        <p:nvCxnSpPr>
-          <p:cNvPr id="215" name="Connector: Elbow 214">
-            <a:extLst>
-              <a:ext uri="{FF2B5EF4-FFF2-40B4-BE49-F238E27FC236}">
-                <a16:creationId xmlns:a16="http://schemas.microsoft.com/office/drawing/2014/main" id="{99E67DCF-825B-F131-AE72-2307BCF0F036}"/>
-              </a:ext>
-            </a:extLst>
-          </p:cNvPr>
-          <p:cNvCxnSpPr>
-            <a:cxnSpLocks/>
-            <a:endCxn id="214" idx="2"/>
-          </p:cNvCxnSpPr>
-          <p:nvPr/>
-        </p:nvCxnSpPr>
-        <p:spPr>
-          <a:xfrm rot="16200000" flipH="1">
-            <a:off x="5388073" y="3184918"/>
-            <a:ext cx="367481" cy="131451"/>
-          </a:xfrm>
-          <a:prstGeom prst="bentConnector2">
-            <a:avLst/>
-          </a:prstGeom>
-          <a:ln w="12700">
-            <a:tailEnd type="triangle"/>
-          </a:ln>
-        </p:spPr>
-        <p:style>
-          <a:lnRef idx="2">
-            <a:schemeClr val="accent1"/>
-          </a:lnRef>
-          <a:fillRef idx="0">
-            <a:schemeClr val="accent1"/>
-          </a:fillRef>
-          <a:effectRef idx="1">
-            <a:schemeClr val="accent1"/>
-          </a:effectRef>
-          <a:fontRef idx="minor">
-            <a:schemeClr val="tx1"/>
-          </a:fontRef>
-        </p:style>
-      </p:cxnSp>
-      <mc:AlternateContent xmlns:mc="http://schemas.openxmlformats.org/markup-compatibility/2006">
-        <mc:Choice xmlns:a14="http://schemas.microsoft.com/office/drawing/2010/main" Requires="a14">
-          <p:sp>
-            <p:nvSpPr>
-              <p:cNvPr id="216" name="TextBox 215">
-                <a:extLst>
-                  <a:ext uri="{FF2B5EF4-FFF2-40B4-BE49-F238E27FC236}">
-                    <a16:creationId xmlns:a16="http://schemas.microsoft.com/office/drawing/2014/main" id="{9656EB1A-B784-F557-8D11-1192A42992ED}"/>
-                  </a:ext>
-                </a:extLst>
-              </p:cNvPr>
-              <p:cNvSpPr txBox="1"/>
-              <p:nvPr/>
-            </p:nvSpPr>
-            <p:spPr>
-              <a:xfrm>
-                <a:off x="5595850" y="3270080"/>
-                <a:ext cx="289008" cy="276999"/>
-              </a:xfrm>
-              <a:prstGeom prst="rect">
-                <a:avLst/>
-              </a:prstGeom>
-              <a:noFill/>
-            </p:spPr>
-            <p:txBody>
-              <a:bodyPr wrap="square">
-                <a:spAutoFit/>
-              </a:bodyPr>
-              <a:lstStyle/>
-              <a:p>
-                <a:pPr/>
-                <a14:m>
-                  <m:oMathPara xmlns:m="http://schemas.openxmlformats.org/officeDocument/2006/math">
-                    <m:oMath>
-                      <m:sSub>
-                        <m:sSubPr>
-                          <m:ctrlPr>
-                            <a:rPr lang="de-DE" sz="1200" i="1">
-                              <a:solidFill>
-                                <a:schemeClr val="bg1"/>
-                              </a:solidFill>
-                              <a:latin typeface="Cambria Math" panose="02040503050406030204" pitchFamily="18" charset="0"/>
-                            </a:rPr>
-                          </m:ctrlPr>
-                        </m:sSubPr>
-                        <m:e>
-                          <m:r>
-                            <m:rPr>
-                              <m:sty m:val="p"/>
-                            </m:rPr>
-                            <a:rPr lang="de-DE" sz="1200" i="1">
-                              <a:solidFill>
-                                <a:schemeClr val="bg1"/>
-                              </a:solidFill>
-                              <a:latin typeface="Cambria Math" panose="02040503050406030204" pitchFamily="18" charset="0"/>
-                            </a:rPr>
-                            <m:t>r</m:t>
-                          </m:r>
-                        </m:e>
-                        <m:sub>
-                          <m:r>
-                            <m:rPr>
-                              <m:sty m:val="p"/>
-                            </m:rPr>
-                            <a:rPr lang="en-GB" sz="1200" i="1">
-                              <a:solidFill>
-                                <a:schemeClr val="bg1"/>
-                              </a:solidFill>
-                              <a:latin typeface="Cambria Math" panose="02040503050406030204" pitchFamily="18" charset="0"/>
-                            </a:rPr>
-                            <m:t>F</m:t>
-                          </m:r>
-                          <m:r>
-                            <m:rPr>
-                              <m:sty m:val="p"/>
-                            </m:rPr>
-                            <a:rPr lang="en-GB" sz="1200" i="1">
-                              <a:solidFill>
-                                <a:schemeClr val="bg1"/>
-                              </a:solidFill>
-                              <a:latin typeface="Cambria Math" panose="02040503050406030204" pitchFamily="18" charset="0"/>
-                            </a:rPr>
-                            <m:t>s</m:t>
-                          </m:r>
-                        </m:sub>
-                      </m:sSub>
-                    </m:oMath>
-                  </m:oMathPara>
-                </a14:m>
-                <a:endParaRPr lang="en-US" sz="1200" dirty="0">
-                  <a:solidFill>
-                    <a:schemeClr val="bg1"/>
-                  </a:solidFill>
-                </a:endParaRPr>
-              </a:p>
-            </p:txBody>
-          </p:sp>
-        </mc:Choice>
-        <mc:Fallback>
-          <p:sp>
-            <p:nvSpPr>
-              <p:cNvPr id="216" name="TextBox 215">
-                <a:extLst>
-                  <a:ext uri="{FF2B5EF4-FFF2-40B4-BE49-F238E27FC236}">
-                    <a16:creationId xmlns:a16="http://schemas.microsoft.com/office/drawing/2014/main" id="{9656EB1A-B784-F557-8D11-1192A42992ED}"/>
-                  </a:ext>
-                </a:extLst>
-              </p:cNvPr>
-              <p:cNvSpPr txBox="1">
-                <a:spLocks noRot="1" noChangeAspect="1" noMove="1" noResize="1" noEditPoints="1" noAdjustHandles="1" noChangeArrowheads="1" noChangeShapeType="1" noTextEdit="1"/>
-              </p:cNvSpPr>
-              <p:nvPr/>
-            </p:nvSpPr>
-            <p:spPr>
-              <a:xfrm>
-                <a:off x="5595850" y="3270080"/>
-                <a:ext cx="289008" cy="276999"/>
-              </a:xfrm>
-              <a:prstGeom prst="rect">
-                <a:avLst/>
-              </a:prstGeom>
-              <a:blipFill>
-                <a:blip r:embed="rId8"/>
-                <a:stretch>
-                  <a:fillRect r="-6383"/>
-                </a:stretch>
-              </a:blipFill>
-            </p:spPr>
-            <p:txBody>
-              <a:bodyPr/>
-              <a:lstStyle/>
-              <a:p>
-                <a:r>
-                  <a:rPr lang="en-US">
-                    <a:noFill/>
-                  </a:rPr>
-                  <a:t> </a:t>
-                </a:r>
-              </a:p>
-            </p:txBody>
-          </p:sp>
-        </mc:Fallback>
-      </mc:AlternateContent>
-      <p:cxnSp>
-        <p:nvCxnSpPr>
-          <p:cNvPr id="217" name="Straight Arrow Connector 216">
-            <a:extLst>
-              <a:ext uri="{FF2B5EF4-FFF2-40B4-BE49-F238E27FC236}">
-                <a16:creationId xmlns:a16="http://schemas.microsoft.com/office/drawing/2014/main" id="{9843DB38-A43E-0918-E1D8-5A2E12A898D4}"/>
-              </a:ext>
-            </a:extLst>
-          </p:cNvPr>
-          <p:cNvCxnSpPr>
-            <a:cxnSpLocks/>
-            <a:stCxn id="214" idx="6"/>
-          </p:cNvCxnSpPr>
-          <p:nvPr/>
-        </p:nvCxnSpPr>
-        <p:spPr>
-          <a:xfrm>
-            <a:off x="5911858" y="3434384"/>
-            <a:ext cx="175053" cy="0"/>
-          </a:xfrm>
-          <a:prstGeom prst="straightConnector1">
-            <a:avLst/>
-          </a:prstGeom>
-          <a:ln w="12700">
-            <a:tailEnd type="triangle" w="med" len="med"/>
-          </a:ln>
-        </p:spPr>
-        <p:style>
-          <a:lnRef idx="2">
-            <a:schemeClr val="accent1"/>
-          </a:lnRef>
-          <a:fillRef idx="0">
-            <a:schemeClr val="accent1"/>
-          </a:fillRef>
-          <a:effectRef idx="1">
-            <a:schemeClr val="accent1"/>
-          </a:effectRef>
-          <a:fontRef idx="minor">
-            <a:schemeClr val="tx1"/>
-          </a:fontRef>
-        </p:style>
-      </p:cxnSp>
-      <mc:AlternateContent xmlns:mc="http://schemas.openxmlformats.org/markup-compatibility/2006">
-        <mc:Choice xmlns:a14="http://schemas.microsoft.com/office/drawing/2010/main" Requires="a14">
-          <p:sp>
-            <p:nvSpPr>
-              <p:cNvPr id="218" name="TextBox 217">
-                <a:extLst>
-                  <a:ext uri="{FF2B5EF4-FFF2-40B4-BE49-F238E27FC236}">
-                    <a16:creationId xmlns:a16="http://schemas.microsoft.com/office/drawing/2014/main" id="{2CD5148A-C28C-1B39-6D0C-324F503770B2}"/>
-                  </a:ext>
-                </a:extLst>
-              </p:cNvPr>
-              <p:cNvSpPr txBox="1"/>
-              <p:nvPr/>
-            </p:nvSpPr>
-            <p:spPr>
-              <a:xfrm>
-                <a:off x="6096000" y="3336667"/>
-                <a:ext cx="128240" cy="184666"/>
-              </a:xfrm>
-              <a:prstGeom prst="rect">
-                <a:avLst/>
-              </a:prstGeom>
-              <a:noFill/>
-            </p:spPr>
-            <p:txBody>
-              <a:bodyPr wrap="none" lIns="0" tIns="0" rIns="0" bIns="0" rtlCol="0">
-                <a:spAutoFit/>
-              </a:bodyPr>
-              <a:lstStyle/>
-              <a:p>
-                <a14:m>
-                  <m:oMathPara xmlns:m="http://schemas.openxmlformats.org/officeDocument/2006/math">
-                    <m:oMath>
-                      <m:r>
-                        <a:rPr lang="en-US" sz="1200" i="1">
-                          <a:latin typeface="Cambria Math" panose="02040503050406030204" pitchFamily="18" charset="0"/>
-                          <a:ea typeface="Cambria Math" panose="02040503050406030204" pitchFamily="18" charset="0"/>
-                        </a:rPr>
-                        <m:t>∅</m:t>
-                      </m:r>
-                    </m:oMath>
-                  </m:oMathPara>
-                </a14:m>
-                <a:endParaRPr lang="en-US" sz="1200" dirty="0"/>
-              </a:p>
-            </p:txBody>
-          </p:sp>
-        </mc:Choice>
-        <mc:Fallback>
-          <p:sp>
-            <p:nvSpPr>
-              <p:cNvPr id="218" name="TextBox 217">
-                <a:extLst>
-                  <a:ext uri="{FF2B5EF4-FFF2-40B4-BE49-F238E27FC236}">
-                    <a16:creationId xmlns:a16="http://schemas.microsoft.com/office/drawing/2014/main" id="{2CD5148A-C28C-1B39-6D0C-324F503770B2}"/>
-                  </a:ext>
-                </a:extLst>
-              </p:cNvPr>
-              <p:cNvSpPr txBox="1">
-                <a:spLocks noRot="1" noChangeAspect="1" noMove="1" noResize="1" noEditPoints="1" noAdjustHandles="1" noChangeArrowheads="1" noChangeShapeType="1" noTextEdit="1"/>
-              </p:cNvSpPr>
-              <p:nvPr/>
-            </p:nvSpPr>
-            <p:spPr>
-              <a:xfrm>
-                <a:off x="6096000" y="3336667"/>
-                <a:ext cx="128240" cy="184666"/>
-              </a:xfrm>
-              <a:prstGeom prst="rect">
-                <a:avLst/>
-              </a:prstGeom>
-              <a:blipFill>
-                <a:blip r:embed="rId9"/>
-                <a:stretch>
-                  <a:fillRect l="-33333" r="-38095" b="-16129"/>
-                </a:stretch>
-              </a:blipFill>
-            </p:spPr>
-            <p:txBody>
-              <a:bodyPr/>
-              <a:lstStyle/>
-              <a:p>
-                <a:r>
-                  <a:rPr lang="en-US">
-                    <a:noFill/>
-                  </a:rPr>
-                  <a:t> </a:t>
-                </a:r>
-              </a:p>
-            </p:txBody>
-          </p:sp>
-        </mc:Fallback>
-      </mc:AlternateContent>
-      <p:cxnSp>
-        <p:nvCxnSpPr>
-          <p:cNvPr id="219" name="Connector: Elbow 218">
-            <a:extLst>
-              <a:ext uri="{FF2B5EF4-FFF2-40B4-BE49-F238E27FC236}">
-                <a16:creationId xmlns:a16="http://schemas.microsoft.com/office/drawing/2014/main" id="{64E082BC-61A2-1EA3-C6BF-E78B5F4F5DB9}"/>
-              </a:ext>
-            </a:extLst>
-          </p:cNvPr>
-          <p:cNvCxnSpPr>
-            <a:cxnSpLocks/>
-            <a:endCxn id="198" idx="1"/>
-          </p:cNvCxnSpPr>
-          <p:nvPr/>
-        </p:nvCxnSpPr>
-        <p:spPr>
-          <a:xfrm flipV="1">
-            <a:off x="4721408" y="2265607"/>
-            <a:ext cx="403605" cy="384025"/>
-          </a:xfrm>
-          <a:prstGeom prst="bentConnector3">
-            <a:avLst>
-              <a:gd name="adj1" fmla="val 50000"/>
-            </a:avLst>
-          </a:prstGeom>
-          <a:ln w="12700">
-            <a:tailEnd type="triangle"/>
-          </a:ln>
-        </p:spPr>
-        <p:style>
-          <a:lnRef idx="2">
-            <a:schemeClr val="accent1"/>
-          </a:lnRef>
-          <a:fillRef idx="0">
-            <a:schemeClr val="accent1"/>
-          </a:fillRef>
-          <a:effectRef idx="1">
-            <a:schemeClr val="accent1"/>
-          </a:effectRef>
-          <a:fontRef idx="minor">
-            <a:schemeClr val="tx1"/>
-          </a:fontRef>
-        </p:style>
-      </p:cxnSp>
-      <p:cxnSp>
-        <p:nvCxnSpPr>
-          <p:cNvPr id="220" name="Connector: Elbow 219">
-            <a:extLst>
-              <a:ext uri="{FF2B5EF4-FFF2-40B4-BE49-F238E27FC236}">
-                <a16:creationId xmlns:a16="http://schemas.microsoft.com/office/drawing/2014/main" id="{2FE3C500-D78B-D99C-31C1-915CF22AEBE4}"/>
-              </a:ext>
-            </a:extLst>
-          </p:cNvPr>
-          <p:cNvCxnSpPr>
-            <a:cxnSpLocks/>
-            <a:endCxn id="203" idx="1"/>
-          </p:cNvCxnSpPr>
-          <p:nvPr/>
-        </p:nvCxnSpPr>
-        <p:spPr>
-          <a:xfrm>
-            <a:off x="4721407" y="2649632"/>
-            <a:ext cx="402906" cy="400239"/>
-          </a:xfrm>
-          <a:prstGeom prst="bentConnector3">
-            <a:avLst>
-              <a:gd name="adj1" fmla="val 50000"/>
-            </a:avLst>
-          </a:prstGeom>
-          <a:ln w="12700">
-            <a:tailEnd type="triangle"/>
-          </a:ln>
-        </p:spPr>
-        <p:style>
-          <a:lnRef idx="2">
-            <a:schemeClr val="accent1"/>
-          </a:lnRef>
-          <a:fillRef idx="0">
-            <a:schemeClr val="accent1"/>
-          </a:fillRef>
-          <a:effectRef idx="1">
-            <a:schemeClr val="accent1"/>
-          </a:effectRef>
-          <a:fontRef idx="minor">
-            <a:schemeClr val="tx1"/>
-          </a:fontRef>
-        </p:style>
-      </p:cxnSp>
-      <mc:AlternateContent xmlns:mc="http://schemas.openxmlformats.org/markup-compatibility/2006">
-        <mc:Choice xmlns:a14="http://schemas.microsoft.com/office/drawing/2010/main" Requires="a14">
-          <p:sp>
-            <p:nvSpPr>
-              <p:cNvPr id="221" name="TextBox 220">
-                <a:extLst>
-                  <a:ext uri="{FF2B5EF4-FFF2-40B4-BE49-F238E27FC236}">
-                    <a16:creationId xmlns:a16="http://schemas.microsoft.com/office/drawing/2014/main" id="{E90E69E5-7225-0E22-F469-93B0B8352019}"/>
-                  </a:ext>
-                </a:extLst>
-              </p:cNvPr>
-              <p:cNvSpPr txBox="1"/>
-              <p:nvPr/>
-            </p:nvSpPr>
-            <p:spPr>
-              <a:xfrm>
-                <a:off x="4445914" y="2319119"/>
-                <a:ext cx="458780" cy="276999"/>
-              </a:xfrm>
-              <a:prstGeom prst="rect">
-                <a:avLst/>
-              </a:prstGeom>
-              <a:noFill/>
-            </p:spPr>
-            <p:txBody>
-              <a:bodyPr wrap="none" rtlCol="0">
-                <a:spAutoFit/>
-              </a:bodyPr>
-              <a:lstStyle/>
-              <a:p>
-                <a:pPr/>
-                <a14:m>
-                  <m:oMathPara xmlns:m="http://schemas.openxmlformats.org/officeDocument/2006/math">
-                    <m:oMath>
-                      <m:sSub>
-                        <m:sSubPr>
-                          <m:ctrlPr>
-                            <a:rPr lang="de-DE" sz="1200" i="1">
-                              <a:latin typeface="Cambria Math" panose="02040503050406030204" pitchFamily="18" charset="0"/>
-                            </a:rPr>
-                          </m:ctrlPr>
-                        </m:sSubPr>
-                        <m:e>
-                          <m:r>
-                            <m:rPr>
-                              <m:sty m:val="p"/>
-                            </m:rPr>
-                            <a:rPr lang="de-DE" sz="1200" i="1">
-                              <a:latin typeface="Cambria Math" panose="02040503050406030204" pitchFamily="18" charset="0"/>
-                            </a:rPr>
-                            <m:t>m</m:t>
-                          </m:r>
-                        </m:e>
-                        <m:sub>
-                          <m:r>
-                            <m:rPr>
-                              <m:sty m:val="p"/>
-                            </m:rPr>
-                            <a:rPr lang="de-DE" sz="1200" i="1">
-                              <a:latin typeface="Cambria Math" panose="02040503050406030204" pitchFamily="18" charset="0"/>
-                            </a:rPr>
-                            <m:t>in</m:t>
-                          </m:r>
-                        </m:sub>
-                      </m:sSub>
-                    </m:oMath>
-                  </m:oMathPara>
-                </a14:m>
-                <a:endParaRPr lang="en-US" sz="1200" dirty="0"/>
-              </a:p>
-            </p:txBody>
-          </p:sp>
-        </mc:Choice>
-        <mc:Fallback>
-          <p:sp>
-            <p:nvSpPr>
-              <p:cNvPr id="221" name="TextBox 220">
-                <a:extLst>
-                  <a:ext uri="{FF2B5EF4-FFF2-40B4-BE49-F238E27FC236}">
-                    <a16:creationId xmlns:a16="http://schemas.microsoft.com/office/drawing/2014/main" id="{E90E69E5-7225-0E22-F469-93B0B8352019}"/>
-                  </a:ext>
-                </a:extLst>
-              </p:cNvPr>
-              <p:cNvSpPr txBox="1">
-                <a:spLocks noRot="1" noChangeAspect="1" noMove="1" noResize="1" noEditPoints="1" noAdjustHandles="1" noChangeArrowheads="1" noChangeShapeType="1" noTextEdit="1"/>
-              </p:cNvSpPr>
-              <p:nvPr/>
-            </p:nvSpPr>
-            <p:spPr>
-              <a:xfrm>
-                <a:off x="4445914" y="2319119"/>
-                <a:ext cx="458780" cy="276999"/>
-              </a:xfrm>
-              <a:prstGeom prst="rect">
-                <a:avLst/>
-              </a:prstGeom>
-              <a:blipFill>
-                <a:blip r:embed="rId10"/>
-                <a:stretch>
-                  <a:fillRect/>
-                </a:stretch>
-              </a:blipFill>
-            </p:spPr>
-            <p:txBody>
-              <a:bodyPr/>
-              <a:lstStyle/>
-              <a:p>
-                <a:r>
-                  <a:rPr lang="en-US">
-                    <a:noFill/>
-                  </a:rPr>
-                  <a:t> </a:t>
-                </a:r>
-              </a:p>
-            </p:txBody>
-          </p:sp>
-        </mc:Fallback>
-      </mc:AlternateContent>
-      <mc:AlternateContent xmlns:mc="http://schemas.openxmlformats.org/markup-compatibility/2006">
-        <mc:Choice xmlns:a14="http://schemas.microsoft.com/office/drawing/2010/main" Requires="a14">
-          <p:sp>
-            <p:nvSpPr>
-              <p:cNvPr id="222" name="TextBox 221">
-                <a:extLst>
-                  <a:ext uri="{FF2B5EF4-FFF2-40B4-BE49-F238E27FC236}">
-                    <a16:creationId xmlns:a16="http://schemas.microsoft.com/office/drawing/2014/main" id="{7A9E239B-B1C6-BA27-D50D-C7D3B31D6B72}"/>
-                  </a:ext>
-                </a:extLst>
-              </p:cNvPr>
-              <p:cNvSpPr txBox="1"/>
-              <p:nvPr/>
-            </p:nvSpPr>
-            <p:spPr>
-              <a:xfrm>
-                <a:off x="6320978" y="2554779"/>
+                <a:off x="3577414" y="1085559"/>
                 <a:ext cx="349080" cy="276999"/>
               </a:xfrm>
               <a:prstGeom prst="rect">
@@ -5416,13 +4125,13 @@
             </p:txBody>
           </p:sp>
         </mc:Choice>
-        <mc:Fallback>
+        <mc:Fallback xmlns="">
           <p:sp>
             <p:nvSpPr>
-              <p:cNvPr id="222" name="TextBox 221">
+              <p:cNvPr id="16" name="TextBox 15">
                 <a:extLst>
                   <a:ext uri="{FF2B5EF4-FFF2-40B4-BE49-F238E27FC236}">
-                    <a16:creationId xmlns:a16="http://schemas.microsoft.com/office/drawing/2014/main" id="{7A9E239B-B1C6-BA27-D50D-C7D3B31D6B72}"/>
+                    <a16:creationId xmlns:a16="http://schemas.microsoft.com/office/drawing/2014/main" id="{7B2CCE0B-996B-03D8-3FD1-666EE7F3861C}"/>
                   </a:ext>
                 </a:extLst>
               </p:cNvPr>
@@ -5433,14 +4142,14 @@
             </p:nvSpPr>
             <p:spPr>
               <a:xfrm>
-                <a:off x="6320978" y="2554779"/>
+                <a:off x="3577414" y="1085559"/>
                 <a:ext cx="349080" cy="276999"/>
               </a:xfrm>
               <a:prstGeom prst="rect">
                 <a:avLst/>
               </a:prstGeom>
               <a:blipFill>
-                <a:blip r:embed="rId11"/>
+                <a:blip r:embed="rId5"/>
                 <a:stretch>
                   <a:fillRect/>
                 </a:stretch>
@@ -5463,22 +4172,300 @@
       </mc:AlternateContent>
       <p:cxnSp>
         <p:nvCxnSpPr>
-          <p:cNvPr id="223" name="Straight Arrow Connector 222">
-            <a:extLst>
-              <a:ext uri="{FF2B5EF4-FFF2-40B4-BE49-F238E27FC236}">
-                <a16:creationId xmlns:a16="http://schemas.microsoft.com/office/drawing/2014/main" id="{20EB6EAB-281F-FA79-5C36-FF4AF2728C49}"/>
+          <p:cNvPr id="17" name="Connector: Elbow 16">
+            <a:extLst>
+              <a:ext uri="{FF2B5EF4-FFF2-40B4-BE49-F238E27FC236}">
+                <a16:creationId xmlns:a16="http://schemas.microsoft.com/office/drawing/2014/main" id="{03F87538-4319-1395-0577-72ADF2A2EAF7}"/>
               </a:ext>
             </a:extLst>
           </p:cNvPr>
           <p:cNvCxnSpPr>
             <a:cxnSpLocks/>
+            <a:stCxn id="8" idx="6"/>
+            <a:endCxn id="16" idx="2"/>
+          </p:cNvCxnSpPr>
+          <p:nvPr/>
+        </p:nvCxnSpPr>
+        <p:spPr>
+          <a:xfrm flipV="1">
+            <a:off x="2676465" y="1362558"/>
+            <a:ext cx="1075491" cy="231959"/>
+          </a:xfrm>
+          <a:prstGeom prst="bentConnector2">
+            <a:avLst/>
+          </a:prstGeom>
+          <a:ln w="12700">
+            <a:tailEnd type="triangle"/>
+          </a:ln>
+        </p:spPr>
+        <p:style>
+          <a:lnRef idx="2">
+            <a:schemeClr val="accent1"/>
+          </a:lnRef>
+          <a:fillRef idx="0">
+            <a:schemeClr val="accent1"/>
+          </a:fillRef>
+          <a:effectRef idx="1">
+            <a:schemeClr val="accent1"/>
+          </a:effectRef>
+          <a:fontRef idx="minor">
+            <a:schemeClr val="tx1"/>
+          </a:fontRef>
+        </p:style>
+      </p:cxnSp>
+      <p:sp>
+        <p:nvSpPr>
+          <p:cNvPr id="18" name="Oval 17">
+            <a:extLst>
+              <a:ext uri="{FF2B5EF4-FFF2-40B4-BE49-F238E27FC236}">
+                <a16:creationId xmlns:a16="http://schemas.microsoft.com/office/drawing/2014/main" id="{D829C8E6-9940-349B-7453-72A37787A026}"/>
+              </a:ext>
+            </a:extLst>
+          </p:cNvPr>
+          <p:cNvSpPr>
+            <a:spLocks noChangeAspect="1"/>
+          </p:cNvSpPr>
+          <p:nvPr/>
+        </p:nvSpPr>
+        <p:spPr>
+          <a:xfrm>
+            <a:off x="2893977" y="1828002"/>
+            <a:ext cx="274319" cy="274320"/>
+          </a:xfrm>
+          <a:prstGeom prst="ellipse">
+            <a:avLst/>
+          </a:prstGeom>
+          <a:ln w="12700"/>
+        </p:spPr>
+        <p:style>
+          <a:lnRef idx="2">
+            <a:schemeClr val="accent1">
+              <a:shade val="15000"/>
+            </a:schemeClr>
+          </a:lnRef>
+          <a:fillRef idx="1">
+            <a:schemeClr val="accent1"/>
+          </a:fillRef>
+          <a:effectRef idx="0">
+            <a:schemeClr val="accent1"/>
+          </a:effectRef>
+          <a:fontRef idx="minor">
+            <a:schemeClr val="lt1"/>
+          </a:fontRef>
+        </p:style>
+        <p:txBody>
+          <a:bodyPr rtlCol="0" anchor="ctr"/>
+          <a:lstStyle/>
+          <a:p>
+            <a:pPr algn="ctr"/>
+            <a:endParaRPr lang="en-US" sz="1200"/>
+          </a:p>
+        </p:txBody>
+      </p:sp>
+      <p:cxnSp>
+        <p:nvCxnSpPr>
+          <p:cNvPr id="19" name="Connector: Elbow 18">
+            <a:extLst>
+              <a:ext uri="{FF2B5EF4-FFF2-40B4-BE49-F238E27FC236}">
+                <a16:creationId xmlns:a16="http://schemas.microsoft.com/office/drawing/2014/main" id="{63F282F5-488F-AFBB-2A97-61E9565B6030}"/>
+              </a:ext>
+            </a:extLst>
+          </p:cNvPr>
+          <p:cNvCxnSpPr>
+            <a:cxnSpLocks/>
+            <a:endCxn id="18" idx="2"/>
+          </p:cNvCxnSpPr>
+          <p:nvPr/>
+        </p:nvCxnSpPr>
+        <p:spPr>
+          <a:xfrm rot="16200000" flipH="1">
+            <a:off x="2644511" y="1715698"/>
+            <a:ext cx="367481" cy="131451"/>
+          </a:xfrm>
+          <a:prstGeom prst="bentConnector2">
+            <a:avLst/>
+          </a:prstGeom>
+          <a:ln w="12700">
+            <a:tailEnd type="triangle"/>
+          </a:ln>
+        </p:spPr>
+        <p:style>
+          <a:lnRef idx="2">
+            <a:schemeClr val="accent1"/>
+          </a:lnRef>
+          <a:fillRef idx="0">
+            <a:schemeClr val="accent1"/>
+          </a:fillRef>
+          <a:effectRef idx="1">
+            <a:schemeClr val="accent1"/>
+          </a:effectRef>
+          <a:fontRef idx="minor">
+            <a:schemeClr val="tx1"/>
+          </a:fontRef>
+        </p:style>
+      </p:cxnSp>
+      <mc:AlternateContent xmlns:mc="http://schemas.openxmlformats.org/markup-compatibility/2006" xmlns:a14="http://schemas.microsoft.com/office/drawing/2010/main">
+        <mc:Choice Requires="a14">
+          <p:sp>
+            <p:nvSpPr>
+              <p:cNvPr id="20" name="TextBox 19">
+                <a:extLst>
+                  <a:ext uri="{FF2B5EF4-FFF2-40B4-BE49-F238E27FC236}">
+                    <a16:creationId xmlns:a16="http://schemas.microsoft.com/office/drawing/2014/main" id="{6F029390-70D8-D99C-221F-9A8E5F661DD4}"/>
+                  </a:ext>
+                </a:extLst>
+              </p:cNvPr>
+              <p:cNvSpPr txBox="1"/>
+              <p:nvPr/>
+            </p:nvSpPr>
+            <p:spPr>
+              <a:xfrm>
+                <a:off x="2852286" y="1800860"/>
+                <a:ext cx="289008" cy="276999"/>
+              </a:xfrm>
+              <a:prstGeom prst="rect">
+                <a:avLst/>
+              </a:prstGeom>
+              <a:noFill/>
+            </p:spPr>
+            <p:txBody>
+              <a:bodyPr wrap="square">
+                <a:spAutoFit/>
+              </a:bodyPr>
+              <a:lstStyle/>
+              <a:p>
+                <a:pPr/>
+                <a14:m>
+                  <m:oMathPara xmlns:m="http://schemas.openxmlformats.org/officeDocument/2006/math">
+                    <m:oMath>
+                      <m:sSub>
+                        <m:sSubPr>
+                          <m:ctrlPr>
+                            <a:rPr lang="de-DE" sz="1200" i="1">
+                              <a:solidFill>
+                                <a:schemeClr val="bg1"/>
+                              </a:solidFill>
+                              <a:latin typeface="Cambria Math" panose="02040503050406030204" pitchFamily="18" charset="0"/>
+                            </a:rPr>
+                          </m:ctrlPr>
+                        </m:sSubPr>
+                        <m:e>
+                          <m:r>
+                            <m:rPr>
+                              <m:sty m:val="p"/>
+                            </m:rPr>
+                            <a:rPr lang="de-DE" sz="1200" i="1">
+                              <a:solidFill>
+                                <a:schemeClr val="bg1"/>
+                              </a:solidFill>
+                              <a:latin typeface="Cambria Math" panose="02040503050406030204" pitchFamily="18" charset="0"/>
+                            </a:rPr>
+                            <m:t>r</m:t>
+                          </m:r>
+                        </m:e>
+                        <m:sub>
+                          <m:r>
+                            <m:rPr>
+                              <m:sty m:val="p"/>
+                            </m:rPr>
+                            <a:rPr lang="es-ES" sz="1200" i="1">
+                              <a:solidFill>
+                                <a:schemeClr val="bg1"/>
+                              </a:solidFill>
+                              <a:latin typeface="Cambria Math" panose="02040503050406030204" pitchFamily="18" charset="0"/>
+                            </a:rPr>
+                            <m:t>S</m:t>
+                          </m:r>
+                          <m:r>
+                            <m:rPr>
+                              <m:sty m:val="p"/>
+                            </m:rPr>
+                            <a:rPr lang="de-DE" sz="1200" b="0" i="1" smtClean="0">
+                              <a:solidFill>
+                                <a:schemeClr val="bg1"/>
+                              </a:solidFill>
+                              <a:latin typeface="Cambria Math" panose="02040503050406030204" pitchFamily="18" charset="0"/>
+                            </a:rPr>
+                            <m:t>r</m:t>
+                          </m:r>
+                        </m:sub>
+                      </m:sSub>
+                    </m:oMath>
+                  </m:oMathPara>
+                </a14:m>
+                <a:endParaRPr lang="en-US" sz="1200" dirty="0">
+                  <a:solidFill>
+                    <a:schemeClr val="bg1"/>
+                  </a:solidFill>
+                </a:endParaRPr>
+              </a:p>
+            </p:txBody>
+          </p:sp>
+        </mc:Choice>
+        <mc:Fallback xmlns="">
+          <p:sp>
+            <p:nvSpPr>
+              <p:cNvPr id="20" name="TextBox 19">
+                <a:extLst>
+                  <a:ext uri="{FF2B5EF4-FFF2-40B4-BE49-F238E27FC236}">
+                    <a16:creationId xmlns:a16="http://schemas.microsoft.com/office/drawing/2014/main" id="{6F029390-70D8-D99C-221F-9A8E5F661DD4}"/>
+                  </a:ext>
+                </a:extLst>
+              </p:cNvPr>
+              <p:cNvSpPr txBox="1">
+                <a:spLocks noRot="1" noChangeAspect="1" noMove="1" noResize="1" noEditPoints="1" noAdjustHandles="1" noChangeArrowheads="1" noChangeShapeType="1" noTextEdit="1"/>
+              </p:cNvSpPr>
+              <p:nvPr/>
+            </p:nvSpPr>
+            <p:spPr>
+              <a:xfrm>
+                <a:off x="2852286" y="1800860"/>
+                <a:ext cx="289008" cy="276999"/>
+              </a:xfrm>
+              <a:prstGeom prst="rect">
+                <a:avLst/>
+              </a:prstGeom>
+              <a:blipFill>
+                <a:blip r:embed="rId6"/>
+                <a:stretch>
+                  <a:fillRect r="-2128"/>
+                </a:stretch>
+              </a:blipFill>
+            </p:spPr>
+            <p:txBody>
+              <a:bodyPr/>
+              <a:lstStyle/>
+              <a:p>
+                <a:r>
+                  <a:rPr lang="en-US">
+                    <a:noFill/>
+                  </a:rPr>
+                  <a:t> </a:t>
+                </a:r>
+              </a:p>
+            </p:txBody>
+          </p:sp>
+        </mc:Fallback>
+      </mc:AlternateContent>
+      <p:cxnSp>
+        <p:nvCxnSpPr>
+          <p:cNvPr id="21" name="Straight Arrow Connector 20">
+            <a:extLst>
+              <a:ext uri="{FF2B5EF4-FFF2-40B4-BE49-F238E27FC236}">
+                <a16:creationId xmlns:a16="http://schemas.microsoft.com/office/drawing/2014/main" id="{95675083-2A6B-C400-40E6-4073328E44A5}"/>
+              </a:ext>
+            </a:extLst>
+          </p:cNvPr>
+          <p:cNvCxnSpPr>
+            <a:cxnSpLocks/>
+            <a:stCxn id="18" idx="6"/>
           </p:cNvCxnSpPr>
           <p:nvPr/>
         </p:nvCxnSpPr>
         <p:spPr>
           <a:xfrm>
-            <a:off x="6501356" y="2292784"/>
-            <a:ext cx="361724" cy="0"/>
+            <a:off x="3168296" y="1965162"/>
+            <a:ext cx="175053" cy="0"/>
           </a:xfrm>
           <a:prstGeom prst="straightConnector1">
             <a:avLst/>
@@ -5502,14 +4489,14 @@
           </a:fontRef>
         </p:style>
       </p:cxnSp>
-      <mc:AlternateContent xmlns:mc="http://schemas.openxmlformats.org/markup-compatibility/2006">
-        <mc:Choice xmlns:a14="http://schemas.microsoft.com/office/drawing/2010/main" Requires="a14">
+      <mc:AlternateContent xmlns:mc="http://schemas.openxmlformats.org/markup-compatibility/2006" xmlns:a14="http://schemas.microsoft.com/office/drawing/2010/main">
+        <mc:Choice Requires="a14">
           <p:sp>
             <p:nvSpPr>
-              <p:cNvPr id="226" name="TextBox 225">
+              <p:cNvPr id="22" name="TextBox 21">
                 <a:extLst>
                   <a:ext uri="{FF2B5EF4-FFF2-40B4-BE49-F238E27FC236}">
-                    <a16:creationId xmlns:a16="http://schemas.microsoft.com/office/drawing/2014/main" id="{E7396E38-79E0-91AE-328F-3CA2E777979F}"/>
+                    <a16:creationId xmlns:a16="http://schemas.microsoft.com/office/drawing/2014/main" id="{D90FB774-BF8F-6CC1-0856-9E4E5D2CEC7D}"/>
                   </a:ext>
                 </a:extLst>
               </p:cNvPr>
@@ -5518,8 +4505,8 @@
             </p:nvSpPr>
             <p:spPr>
               <a:xfrm>
-                <a:off x="5303807" y="1950626"/>
-                <a:ext cx="479618" cy="276999"/>
+                <a:off x="3352436" y="1867445"/>
+                <a:ext cx="128240" cy="184666"/>
               </a:xfrm>
               <a:prstGeom prst="rect">
                 <a:avLst/>
@@ -5527,7 +4514,535 @@
               <a:noFill/>
             </p:spPr>
             <p:txBody>
-              <a:bodyPr wrap="none" rtlCol="0">
+              <a:bodyPr wrap="none" lIns="0" tIns="0" rIns="0" bIns="0" rtlCol="0">
+                <a:spAutoFit/>
+              </a:bodyPr>
+              <a:lstStyle/>
+              <a:p>
+                <a:pPr/>
+                <a14:m>
+                  <m:oMathPara xmlns:m="http://schemas.openxmlformats.org/officeDocument/2006/math">
+                    <m:oMath>
+                      <m:r>
+                        <a:rPr lang="en-US" sz="1200" i="1">
+                          <a:latin typeface="Cambria Math" panose="02040503050406030204" pitchFamily="18" charset="0"/>
+                          <a:ea typeface="Cambria Math" panose="02040503050406030204" pitchFamily="18" charset="0"/>
+                        </a:rPr>
+                        <m:t>∅</m:t>
+                      </m:r>
+                    </m:oMath>
+                  </m:oMathPara>
+                </a14:m>
+                <a:endParaRPr lang="en-US" sz="1200" dirty="0"/>
+              </a:p>
+            </p:txBody>
+          </p:sp>
+        </mc:Choice>
+        <mc:Fallback xmlns="">
+          <p:sp>
+            <p:nvSpPr>
+              <p:cNvPr id="22" name="TextBox 21">
+                <a:extLst>
+                  <a:ext uri="{FF2B5EF4-FFF2-40B4-BE49-F238E27FC236}">
+                    <a16:creationId xmlns:a16="http://schemas.microsoft.com/office/drawing/2014/main" id="{D90FB774-BF8F-6CC1-0856-9E4E5D2CEC7D}"/>
+                  </a:ext>
+                </a:extLst>
+              </p:cNvPr>
+              <p:cNvSpPr txBox="1">
+                <a:spLocks noRot="1" noChangeAspect="1" noMove="1" noResize="1" noEditPoints="1" noAdjustHandles="1" noChangeArrowheads="1" noChangeShapeType="1" noTextEdit="1"/>
+              </p:cNvSpPr>
+              <p:nvPr/>
+            </p:nvSpPr>
+            <p:spPr>
+              <a:xfrm>
+                <a:off x="3352436" y="1867445"/>
+                <a:ext cx="128240" cy="184666"/>
+              </a:xfrm>
+              <a:prstGeom prst="rect">
+                <a:avLst/>
+              </a:prstGeom>
+              <a:blipFill>
+                <a:blip r:embed="rId7"/>
+                <a:stretch>
+                  <a:fillRect l="-38095" r="-38095" b="-16129"/>
+                </a:stretch>
+              </a:blipFill>
+            </p:spPr>
+            <p:txBody>
+              <a:bodyPr/>
+              <a:lstStyle/>
+              <a:p>
+                <a:r>
+                  <a:rPr lang="en-US">
+                    <a:noFill/>
+                  </a:rPr>
+                  <a:t> </a:t>
+                </a:r>
+              </a:p>
+            </p:txBody>
+          </p:sp>
+        </mc:Fallback>
+      </mc:AlternateContent>
+      <p:cxnSp>
+        <p:nvCxnSpPr>
+          <p:cNvPr id="23" name="Straight Arrow Connector 22">
+            <a:extLst>
+              <a:ext uri="{FF2B5EF4-FFF2-40B4-BE49-F238E27FC236}">
+                <a16:creationId xmlns:a16="http://schemas.microsoft.com/office/drawing/2014/main" id="{D1328CC8-B44F-00D9-CC95-4AAF913B059A}"/>
+              </a:ext>
+            </a:extLst>
+          </p:cNvPr>
+          <p:cNvCxnSpPr>
+            <a:cxnSpLocks/>
+          </p:cNvCxnSpPr>
+          <p:nvPr/>
+        </p:nvCxnSpPr>
+        <p:spPr>
+          <a:xfrm>
+            <a:off x="3879734" y="1229803"/>
+            <a:ext cx="175053" cy="0"/>
+          </a:xfrm>
+          <a:prstGeom prst="straightConnector1">
+            <a:avLst/>
+          </a:prstGeom>
+          <a:ln w="12700">
+            <a:tailEnd type="triangle" w="med" len="med"/>
+          </a:ln>
+        </p:spPr>
+        <p:style>
+          <a:lnRef idx="2">
+            <a:schemeClr val="accent1"/>
+          </a:lnRef>
+          <a:fillRef idx="0">
+            <a:schemeClr val="accent1"/>
+          </a:fillRef>
+          <a:effectRef idx="1">
+            <a:schemeClr val="accent1"/>
+          </a:effectRef>
+          <a:fontRef idx="minor">
+            <a:schemeClr val="tx1"/>
+          </a:fontRef>
+        </p:style>
+      </p:cxnSp>
+      <mc:AlternateContent xmlns:mc="http://schemas.openxmlformats.org/markup-compatibility/2006" xmlns:a14="http://schemas.microsoft.com/office/drawing/2010/main">
+        <mc:Choice Requires="a14">
+          <p:sp>
+            <p:nvSpPr>
+              <p:cNvPr id="24" name="TextBox 23">
+                <a:extLst>
+                  <a:ext uri="{FF2B5EF4-FFF2-40B4-BE49-F238E27FC236}">
+                    <a16:creationId xmlns:a16="http://schemas.microsoft.com/office/drawing/2014/main" id="{A49A717B-8180-2006-2D14-7F749770C029}"/>
+                  </a:ext>
+                </a:extLst>
+              </p:cNvPr>
+              <p:cNvSpPr txBox="1"/>
+              <p:nvPr/>
+            </p:nvSpPr>
+            <p:spPr>
+              <a:xfrm>
+                <a:off x="2381451" y="657887"/>
+                <a:ext cx="293275" cy="276999"/>
+              </a:xfrm>
+              <a:prstGeom prst="rect">
+                <a:avLst/>
+              </a:prstGeom>
+              <a:noFill/>
+            </p:spPr>
+            <p:txBody>
+              <a:bodyPr wrap="square">
+                <a:spAutoFit/>
+              </a:bodyPr>
+              <a:lstStyle/>
+              <a:p>
+                <a:pPr/>
+                <a14:m>
+                  <m:oMathPara xmlns:m="http://schemas.openxmlformats.org/officeDocument/2006/math">
+                    <m:oMath>
+                      <m:sSub>
+                        <m:sSubPr>
+                          <m:ctrlPr>
+                            <a:rPr lang="de-DE" sz="1200" i="1">
+                              <a:solidFill>
+                                <a:schemeClr val="bg1"/>
+                              </a:solidFill>
+                              <a:latin typeface="Cambria Math" panose="02040503050406030204" pitchFamily="18" charset="0"/>
+                            </a:rPr>
+                          </m:ctrlPr>
+                        </m:sSubPr>
+                        <m:e>
+                          <m:r>
+                            <m:rPr>
+                              <m:sty m:val="p"/>
+                            </m:rPr>
+                            <a:rPr lang="de-DE" sz="1200" i="1">
+                              <a:solidFill>
+                                <a:schemeClr val="bg1"/>
+                              </a:solidFill>
+                              <a:latin typeface="Cambria Math" panose="02040503050406030204" pitchFamily="18" charset="0"/>
+                            </a:rPr>
+                            <m:t>r</m:t>
+                          </m:r>
+                        </m:e>
+                        <m:sub>
+                          <m:r>
+                            <m:rPr>
+                              <m:sty m:val="p"/>
+                            </m:rPr>
+                            <a:rPr lang="es-ES" sz="1200" i="1">
+                              <a:solidFill>
+                                <a:schemeClr val="bg1"/>
+                              </a:solidFill>
+                              <a:latin typeface="Cambria Math" panose="02040503050406030204" pitchFamily="18" charset="0"/>
+                            </a:rPr>
+                            <m:t>F</m:t>
+                          </m:r>
+                        </m:sub>
+                      </m:sSub>
+                    </m:oMath>
+                  </m:oMathPara>
+                </a14:m>
+                <a:endParaRPr lang="en-US" sz="1200" dirty="0">
+                  <a:solidFill>
+                    <a:schemeClr val="bg1"/>
+                  </a:solidFill>
+                </a:endParaRPr>
+              </a:p>
+            </p:txBody>
+          </p:sp>
+        </mc:Choice>
+        <mc:Fallback xmlns="">
+          <p:sp>
+            <p:nvSpPr>
+              <p:cNvPr id="24" name="TextBox 23">
+                <a:extLst>
+                  <a:ext uri="{FF2B5EF4-FFF2-40B4-BE49-F238E27FC236}">
+                    <a16:creationId xmlns:a16="http://schemas.microsoft.com/office/drawing/2014/main" id="{A49A717B-8180-2006-2D14-7F749770C029}"/>
+                  </a:ext>
+                </a:extLst>
+              </p:cNvPr>
+              <p:cNvSpPr txBox="1">
+                <a:spLocks noRot="1" noChangeAspect="1" noMove="1" noResize="1" noEditPoints="1" noAdjustHandles="1" noChangeArrowheads="1" noChangeShapeType="1" noTextEdit="1"/>
+              </p:cNvSpPr>
+              <p:nvPr/>
+            </p:nvSpPr>
+            <p:spPr>
+              <a:xfrm>
+                <a:off x="2381451" y="657887"/>
+                <a:ext cx="293275" cy="276999"/>
+              </a:xfrm>
+              <a:prstGeom prst="rect">
+                <a:avLst/>
+              </a:prstGeom>
+              <a:blipFill>
+                <a:blip r:embed="rId8"/>
+                <a:stretch>
+                  <a:fillRect/>
+                </a:stretch>
+              </a:blipFill>
+            </p:spPr>
+            <p:txBody>
+              <a:bodyPr/>
+              <a:lstStyle/>
+              <a:p>
+                <a:r>
+                  <a:rPr lang="en-US">
+                    <a:noFill/>
+                  </a:rPr>
+                  <a:t> </a:t>
+                </a:r>
+              </a:p>
+            </p:txBody>
+          </p:sp>
+        </mc:Fallback>
+      </mc:AlternateContent>
+      <p:cxnSp>
+        <p:nvCxnSpPr>
+          <p:cNvPr id="25" name="Connector: Elbow 24">
+            <a:extLst>
+              <a:ext uri="{FF2B5EF4-FFF2-40B4-BE49-F238E27FC236}">
+                <a16:creationId xmlns:a16="http://schemas.microsoft.com/office/drawing/2014/main" id="{E2EFB206-7F67-9ACF-D3F2-341E855D7DB6}"/>
+              </a:ext>
+            </a:extLst>
+          </p:cNvPr>
+          <p:cNvCxnSpPr>
+            <a:cxnSpLocks/>
+            <a:stCxn id="2" idx="3"/>
+            <a:endCxn id="24" idx="1"/>
+          </p:cNvCxnSpPr>
+          <p:nvPr/>
+        </p:nvCxnSpPr>
+        <p:spPr>
+          <a:xfrm flipV="1">
+            <a:off x="2065801" y="796385"/>
+            <a:ext cx="315648" cy="378976"/>
+          </a:xfrm>
+          <a:prstGeom prst="bentConnector3">
+            <a:avLst>
+              <a:gd name="adj1" fmla="val 50000"/>
+            </a:avLst>
+          </a:prstGeom>
+          <a:ln w="12700">
+            <a:tailEnd type="triangle"/>
+          </a:ln>
+        </p:spPr>
+        <p:style>
+          <a:lnRef idx="2">
+            <a:schemeClr val="accent1"/>
+          </a:lnRef>
+          <a:fillRef idx="0">
+            <a:schemeClr val="accent1"/>
+          </a:fillRef>
+          <a:effectRef idx="1">
+            <a:schemeClr val="accent1"/>
+          </a:effectRef>
+          <a:fontRef idx="minor">
+            <a:schemeClr val="tx1"/>
+          </a:fontRef>
+        </p:style>
+      </p:cxnSp>
+      <p:cxnSp>
+        <p:nvCxnSpPr>
+          <p:cNvPr id="26" name="Connector: Elbow 25">
+            <a:extLst>
+              <a:ext uri="{FF2B5EF4-FFF2-40B4-BE49-F238E27FC236}">
+                <a16:creationId xmlns:a16="http://schemas.microsoft.com/office/drawing/2014/main" id="{D45AA725-3482-2A41-430A-BC824377853B}"/>
+              </a:ext>
+            </a:extLst>
+          </p:cNvPr>
+          <p:cNvCxnSpPr>
+            <a:cxnSpLocks/>
+            <a:stCxn id="2" idx="3"/>
+          </p:cNvCxnSpPr>
+          <p:nvPr/>
+        </p:nvCxnSpPr>
+        <p:spPr>
+          <a:xfrm>
+            <a:off x="2065801" y="1175361"/>
+            <a:ext cx="314948" cy="405288"/>
+          </a:xfrm>
+          <a:prstGeom prst="bentConnector3">
+            <a:avLst>
+              <a:gd name="adj1" fmla="val 50000"/>
+            </a:avLst>
+          </a:prstGeom>
+          <a:ln w="12700">
+            <a:tailEnd type="triangle"/>
+          </a:ln>
+        </p:spPr>
+        <p:style>
+          <a:lnRef idx="2">
+            <a:schemeClr val="accent1"/>
+          </a:lnRef>
+          <a:fillRef idx="0">
+            <a:schemeClr val="accent1"/>
+          </a:fillRef>
+          <a:effectRef idx="1">
+            <a:schemeClr val="accent1"/>
+          </a:effectRef>
+          <a:fontRef idx="minor">
+            <a:schemeClr val="tx1"/>
+          </a:fontRef>
+        </p:style>
+      </p:cxnSp>
+      <p:cxnSp>
+        <p:nvCxnSpPr>
+          <p:cNvPr id="30" name="Straight Arrow Connector 29">
+            <a:extLst>
+              <a:ext uri="{FF2B5EF4-FFF2-40B4-BE49-F238E27FC236}">
+                <a16:creationId xmlns:a16="http://schemas.microsoft.com/office/drawing/2014/main" id="{2C04EC2E-6EA1-F039-F4E4-954AD9077B4E}"/>
+              </a:ext>
+            </a:extLst>
+          </p:cNvPr>
+          <p:cNvCxnSpPr>
+            <a:cxnSpLocks/>
+            <a:stCxn id="8" idx="6"/>
+          </p:cNvCxnSpPr>
+          <p:nvPr/>
+        </p:nvCxnSpPr>
+        <p:spPr>
+          <a:xfrm>
+            <a:off x="2676465" y="1594515"/>
+            <a:ext cx="1905695" cy="0"/>
+          </a:xfrm>
+          <a:prstGeom prst="straightConnector1">
+            <a:avLst/>
+          </a:prstGeom>
+          <a:ln w="12700">
+            <a:tailEnd type="triangle"/>
+          </a:ln>
+        </p:spPr>
+        <p:style>
+          <a:lnRef idx="2">
+            <a:schemeClr val="accent1"/>
+          </a:lnRef>
+          <a:fillRef idx="0">
+            <a:schemeClr val="accent1"/>
+          </a:fillRef>
+          <a:effectRef idx="1">
+            <a:schemeClr val="accent1"/>
+          </a:effectRef>
+          <a:fontRef idx="minor">
+            <a:schemeClr val="tx1"/>
+          </a:fontRef>
+        </p:style>
+      </p:cxnSp>
+      <mc:AlternateContent xmlns:mc="http://schemas.openxmlformats.org/markup-compatibility/2006" xmlns:a14="http://schemas.microsoft.com/office/drawing/2010/main">
+        <mc:Choice Requires="a14">
+          <p:sp>
+            <p:nvSpPr>
+              <p:cNvPr id="33" name="TextBox 32">
+                <a:extLst>
+                  <a:ext uri="{FF2B5EF4-FFF2-40B4-BE49-F238E27FC236}">
+                    <a16:creationId xmlns:a16="http://schemas.microsoft.com/office/drawing/2014/main" id="{C9CE7D9E-6525-B610-0800-D2367F36EC74}"/>
+                  </a:ext>
+                </a:extLst>
+              </p:cNvPr>
+              <p:cNvSpPr txBox="1"/>
+              <p:nvPr/>
+            </p:nvSpPr>
+            <p:spPr>
+              <a:xfrm>
+                <a:off x="2380749" y="1442151"/>
+                <a:ext cx="333162" cy="276999"/>
+              </a:xfrm>
+              <a:prstGeom prst="rect">
+                <a:avLst/>
+              </a:prstGeom>
+              <a:noFill/>
+            </p:spPr>
+            <p:txBody>
+              <a:bodyPr wrap="square">
+                <a:spAutoFit/>
+              </a:bodyPr>
+              <a:lstStyle/>
+              <a:p>
+                <a:pPr/>
+                <a14:m>
+                  <m:oMathPara xmlns:m="http://schemas.openxmlformats.org/officeDocument/2006/math">
+                    <m:oMath>
+                      <m:sSub>
+                        <m:sSubPr>
+                          <m:ctrlPr>
+                            <a:rPr lang="de-DE" sz="1200" i="1">
+                              <a:solidFill>
+                                <a:schemeClr val="bg1"/>
+                              </a:solidFill>
+                              <a:latin typeface="Cambria Math" panose="02040503050406030204" pitchFamily="18" charset="0"/>
+                            </a:rPr>
+                          </m:ctrlPr>
+                        </m:sSubPr>
+                        <m:e>
+                          <m:r>
+                            <m:rPr>
+                              <m:sty m:val="p"/>
+                            </m:rPr>
+                            <a:rPr lang="de-DE" sz="1200" i="1">
+                              <a:solidFill>
+                                <a:schemeClr val="bg1"/>
+                              </a:solidFill>
+                              <a:latin typeface="Cambria Math" panose="02040503050406030204" pitchFamily="18" charset="0"/>
+                            </a:rPr>
+                            <m:t>r</m:t>
+                          </m:r>
+                        </m:e>
+                        <m:sub>
+                          <m:r>
+                            <m:rPr>
+                              <m:sty m:val="p"/>
+                            </m:rPr>
+                            <a:rPr lang="es-ES" sz="1200" i="1">
+                              <a:solidFill>
+                                <a:schemeClr val="bg1"/>
+                              </a:solidFill>
+                              <a:latin typeface="Cambria Math" panose="02040503050406030204" pitchFamily="18" charset="0"/>
+                            </a:rPr>
+                            <m:t>S</m:t>
+                          </m:r>
+                        </m:sub>
+                      </m:sSub>
+                    </m:oMath>
+                  </m:oMathPara>
+                </a14:m>
+                <a:endParaRPr lang="en-US" sz="1200" dirty="0">
+                  <a:solidFill>
+                    <a:schemeClr val="bg1"/>
+                  </a:solidFill>
+                </a:endParaRPr>
+              </a:p>
+            </p:txBody>
+          </p:sp>
+        </mc:Choice>
+        <mc:Fallback xmlns="">
+          <p:sp>
+            <p:nvSpPr>
+              <p:cNvPr id="33" name="TextBox 32">
+                <a:extLst>
+                  <a:ext uri="{FF2B5EF4-FFF2-40B4-BE49-F238E27FC236}">
+                    <a16:creationId xmlns:a16="http://schemas.microsoft.com/office/drawing/2014/main" id="{C9CE7D9E-6525-B610-0800-D2367F36EC74}"/>
+                  </a:ext>
+                </a:extLst>
+              </p:cNvPr>
+              <p:cNvSpPr txBox="1">
+                <a:spLocks noRot="1" noChangeAspect="1" noMove="1" noResize="1" noEditPoints="1" noAdjustHandles="1" noChangeArrowheads="1" noChangeShapeType="1" noTextEdit="1"/>
+              </p:cNvSpPr>
+              <p:nvPr/>
+            </p:nvSpPr>
+            <p:spPr>
+              <a:xfrm>
+                <a:off x="2380749" y="1442151"/>
+                <a:ext cx="333162" cy="276999"/>
+              </a:xfrm>
+              <a:prstGeom prst="rect">
+                <a:avLst/>
+              </a:prstGeom>
+              <a:blipFill>
+                <a:blip r:embed="rId9"/>
+                <a:stretch>
+                  <a:fillRect/>
+                </a:stretch>
+              </a:blipFill>
+            </p:spPr>
+            <p:txBody>
+              <a:bodyPr/>
+              <a:lstStyle/>
+              <a:p>
+                <a:r>
+                  <a:rPr lang="en-US">
+                    <a:noFill/>
+                  </a:rPr>
+                  <a:t> </a:t>
+                </a:r>
+              </a:p>
+            </p:txBody>
+          </p:sp>
+        </mc:Fallback>
+      </mc:AlternateContent>
+      <mc:AlternateContent xmlns:mc="http://schemas.openxmlformats.org/markup-compatibility/2006" xmlns:a14="http://schemas.microsoft.com/office/drawing/2010/main">
+        <mc:Choice Requires="a14">
+          <p:sp>
+            <p:nvSpPr>
+              <p:cNvPr id="36" name="TextBox 35">
+                <a:extLst>
+                  <a:ext uri="{FF2B5EF4-FFF2-40B4-BE49-F238E27FC236}">
+                    <a16:creationId xmlns:a16="http://schemas.microsoft.com/office/drawing/2014/main" id="{29EB3CB3-E813-CF29-E90A-3ED2FBE58620}"/>
+                  </a:ext>
+                </a:extLst>
+              </p:cNvPr>
+              <p:cNvSpPr txBox="1"/>
+              <p:nvPr/>
+            </p:nvSpPr>
+            <p:spPr>
+              <a:xfrm>
+                <a:off x="2699844" y="1320588"/>
+                <a:ext cx="338842" cy="276999"/>
+              </a:xfrm>
+              <a:prstGeom prst="rect">
+                <a:avLst/>
+              </a:prstGeom>
+              <a:noFill/>
+            </p:spPr>
+            <p:txBody>
+              <a:bodyPr wrap="square" rtlCol="0">
                 <a:spAutoFit/>
               </a:bodyPr>
               <a:lstStyle/>
@@ -5560,16 +5075,10 @@
                             <m:rPr>
                               <m:sty m:val="p"/>
                             </m:rPr>
-                            <a:rPr lang="en-GB" sz="1200" b="0" i="1" smtClean="0">
+                            <a:rPr lang="de-DE" sz="1200" b="0" i="1" smtClean="0">
                               <a:latin typeface="Cambria Math" panose="02040503050406030204" pitchFamily="18" charset="0"/>
                             </a:rPr>
                             <m:t>S</m:t>
-                          </m:r>
-                          <m:r>
-                            <a:rPr lang="en-GB" sz="1200" b="0" i="1" smtClean="0">
-                              <a:latin typeface="Cambria Math" panose="02040503050406030204" pitchFamily="18" charset="0"/>
-                            </a:rPr>
-                            <m:t>1</m:t>
                           </m:r>
                         </m:sub>
                       </m:sSub>
@@ -5581,13 +5090,13 @@
             </p:txBody>
           </p:sp>
         </mc:Choice>
-        <mc:Fallback>
+        <mc:Fallback xmlns="">
           <p:sp>
             <p:nvSpPr>
-              <p:cNvPr id="226" name="TextBox 225">
+              <p:cNvPr id="36" name="TextBox 35">
                 <a:extLst>
                   <a:ext uri="{FF2B5EF4-FFF2-40B4-BE49-F238E27FC236}">
-                    <a16:creationId xmlns:a16="http://schemas.microsoft.com/office/drawing/2014/main" id="{E7396E38-79E0-91AE-328F-3CA2E777979F}"/>
+                    <a16:creationId xmlns:a16="http://schemas.microsoft.com/office/drawing/2014/main" id="{29EB3CB3-E813-CF29-E90A-3ED2FBE58620}"/>
                   </a:ext>
                 </a:extLst>
               </p:cNvPr>
@@ -5598,14 +5107,14 @@
             </p:nvSpPr>
             <p:spPr>
               <a:xfrm>
-                <a:off x="5303807" y="1950626"/>
-                <a:ext cx="479618" cy="276999"/>
+                <a:off x="2699844" y="1320588"/>
+                <a:ext cx="338842" cy="276999"/>
               </a:xfrm>
               <a:prstGeom prst="rect">
                 <a:avLst/>
               </a:prstGeom>
               <a:blipFill>
-                <a:blip r:embed="rId12"/>
+                <a:blip r:embed="rId10"/>
                 <a:stretch>
                   <a:fillRect/>
                 </a:stretch>
@@ -5626,14 +5135,14 @@
           </p:sp>
         </mc:Fallback>
       </mc:AlternateContent>
-      <mc:AlternateContent xmlns:mc="http://schemas.openxmlformats.org/markup-compatibility/2006">
-        <mc:Choice xmlns:a14="http://schemas.microsoft.com/office/drawing/2010/main" Requires="a14">
+      <mc:AlternateContent xmlns:mc="http://schemas.openxmlformats.org/markup-compatibility/2006" xmlns:a14="http://schemas.microsoft.com/office/drawing/2010/main">
+        <mc:Choice Requires="a14">
           <p:sp>
             <p:nvSpPr>
-              <p:cNvPr id="228" name="TextBox 227">
+              <p:cNvPr id="38" name="TextBox 37">
                 <a:extLst>
                   <a:ext uri="{FF2B5EF4-FFF2-40B4-BE49-F238E27FC236}">
-                    <a16:creationId xmlns:a16="http://schemas.microsoft.com/office/drawing/2014/main" id="{ED4E8EC2-344B-68EA-BAD7-05D5656B2D41}"/>
+                    <a16:creationId xmlns:a16="http://schemas.microsoft.com/office/drawing/2014/main" id="{CCC074B6-6174-BDA5-3FD7-F8D0676904A5}"/>
                   </a:ext>
                 </a:extLst>
               </p:cNvPr>
@@ -5642,8 +5151,8 @@
             </p:nvSpPr>
             <p:spPr>
               <a:xfrm>
-                <a:off x="5303910" y="2745009"/>
-                <a:ext cx="482824" cy="276999"/>
+                <a:off x="2721495" y="532143"/>
+                <a:ext cx="338842" cy="276999"/>
               </a:xfrm>
               <a:prstGeom prst="rect">
                 <a:avLst/>
@@ -5651,7 +5160,7 @@
               <a:noFill/>
             </p:spPr>
             <p:txBody>
-              <a:bodyPr wrap="none" rtlCol="0">
+              <a:bodyPr wrap="square" rtlCol="0">
                 <a:spAutoFit/>
               </a:bodyPr>
               <a:lstStyle/>
@@ -5684,16 +5193,10 @@
                             <m:rPr>
                               <m:sty m:val="p"/>
                             </m:rPr>
-                            <a:rPr lang="en-GB" sz="1200" b="0" i="1" smtClean="0">
+                            <a:rPr lang="de-DE" sz="1200" b="0" i="1" smtClean="0">
                               <a:latin typeface="Cambria Math" panose="02040503050406030204" pitchFamily="18" charset="0"/>
                             </a:rPr>
                             <m:t>F</m:t>
-                          </m:r>
-                          <m:r>
-                            <a:rPr lang="en-GB" sz="1200" b="0" i="1" smtClean="0">
-                              <a:latin typeface="Cambria Math" panose="02040503050406030204" pitchFamily="18" charset="0"/>
-                            </a:rPr>
-                            <m:t>1</m:t>
                           </m:r>
                         </m:sub>
                       </m:sSub>
@@ -5705,13 +5208,13 @@
             </p:txBody>
           </p:sp>
         </mc:Choice>
-        <mc:Fallback>
+        <mc:Fallback xmlns="">
           <p:sp>
             <p:nvSpPr>
-              <p:cNvPr id="228" name="TextBox 227">
+              <p:cNvPr id="38" name="TextBox 37">
                 <a:extLst>
                   <a:ext uri="{FF2B5EF4-FFF2-40B4-BE49-F238E27FC236}">
-                    <a16:creationId xmlns:a16="http://schemas.microsoft.com/office/drawing/2014/main" id="{ED4E8EC2-344B-68EA-BAD7-05D5656B2D41}"/>
+                    <a16:creationId xmlns:a16="http://schemas.microsoft.com/office/drawing/2014/main" id="{CCC074B6-6174-BDA5-3FD7-F8D0676904A5}"/>
                   </a:ext>
                 </a:extLst>
               </p:cNvPr>
@@ -5722,404 +5225,14 @@
             </p:nvSpPr>
             <p:spPr>
               <a:xfrm>
-                <a:off x="5303910" y="2745009"/>
-                <a:ext cx="482824" cy="276999"/>
+                <a:off x="2721495" y="532143"/>
+                <a:ext cx="338842" cy="276999"/>
               </a:xfrm>
               <a:prstGeom prst="rect">
                 <a:avLst/>
               </a:prstGeom>
               <a:blipFill>
-                <a:blip r:embed="rId13"/>
-                <a:stretch>
-                  <a:fillRect/>
-                </a:stretch>
-              </a:blipFill>
-            </p:spPr>
-            <p:txBody>
-              <a:bodyPr/>
-              <a:lstStyle/>
-              <a:p>
-                <a:r>
-                  <a:rPr lang="en-US">
-                    <a:noFill/>
-                  </a:rPr>
-                  <a:t> </a:t>
-                </a:r>
-              </a:p>
-            </p:txBody>
-          </p:sp>
-        </mc:Fallback>
-      </mc:AlternateContent>
-      <mc:AlternateContent xmlns:mc="http://schemas.openxmlformats.org/markup-compatibility/2006">
-        <mc:Choice xmlns:a14="http://schemas.microsoft.com/office/drawing/2010/main" Requires="a14">
-          <p:sp>
-            <p:nvSpPr>
-              <p:cNvPr id="230" name="TextBox 229">
-                <a:extLst>
-                  <a:ext uri="{FF2B5EF4-FFF2-40B4-BE49-F238E27FC236}">
-                    <a16:creationId xmlns:a16="http://schemas.microsoft.com/office/drawing/2014/main" id="{5642B236-C7AA-B866-7543-6ED585919212}"/>
-                  </a:ext>
-                </a:extLst>
-              </p:cNvPr>
-              <p:cNvSpPr txBox="1"/>
-              <p:nvPr/>
-            </p:nvSpPr>
-            <p:spPr>
-              <a:xfrm>
-                <a:off x="5881797" y="1960073"/>
-                <a:ext cx="542136" cy="294504"/>
-              </a:xfrm>
-              <a:prstGeom prst="rect">
-                <a:avLst/>
-              </a:prstGeom>
-              <a:noFill/>
-            </p:spPr>
-            <p:txBody>
-              <a:bodyPr wrap="none" rtlCol="0">
-                <a:spAutoFit/>
-              </a:bodyPr>
-              <a:lstStyle/>
-              <a:p>
-                <a:pPr/>
-                <a14:m>
-                  <m:oMathPara xmlns:m="http://schemas.openxmlformats.org/officeDocument/2006/math">
-                    <m:oMath>
-                      <m:sSub>
-                        <m:sSubPr>
-                          <m:ctrlPr>
-                            <a:rPr lang="de-DE" sz="1200" i="1">
-                              <a:latin typeface="Cambria Math" panose="02040503050406030204" pitchFamily="18" charset="0"/>
-                            </a:rPr>
-                          </m:ctrlPr>
-                        </m:sSubPr>
-                        <m:e>
-                          <m:r>
-                            <m:rPr>
-                              <m:sty m:val="p"/>
-                            </m:rPr>
-                            <a:rPr lang="de-DE" sz="1200" i="1">
-                              <a:latin typeface="Cambria Math" panose="02040503050406030204" pitchFamily="18" charset="0"/>
-                            </a:rPr>
-                            <m:t>m</m:t>
-                          </m:r>
-                        </m:e>
-                        <m:sub>
-                          <m:r>
-                            <m:rPr>
-                              <m:sty m:val="p"/>
-                            </m:rPr>
-                            <a:rPr lang="en-GB" sz="1200" b="0" i="1" smtClean="0">
-                              <a:latin typeface="Cambria Math" panose="02040503050406030204" pitchFamily="18" charset="0"/>
-                            </a:rPr>
-                            <m:t>S</m:t>
-                          </m:r>
-                          <m:r>
-                            <m:rPr>
-                              <m:sty m:val="p"/>
-                            </m:rPr>
-                            <a:rPr lang="en-GB" sz="1200" b="0" i="1" smtClean="0">
-                              <a:latin typeface="Cambria Math" panose="02040503050406030204" pitchFamily="18" charset="0"/>
-                            </a:rPr>
-                            <m:t>g</m:t>
-                          </m:r>
-                          <m:r>
-                            <a:rPr lang="en-GB" sz="1200" b="0" i="1" smtClean="0">
-                              <a:latin typeface="Cambria Math" panose="02040503050406030204" pitchFamily="18" charset="0"/>
-                            </a:rPr>
-                            <m:t>1</m:t>
-                          </m:r>
-                        </m:sub>
-                      </m:sSub>
-                    </m:oMath>
-                  </m:oMathPara>
-                </a14:m>
-                <a:endParaRPr lang="en-US" sz="1200" dirty="0"/>
-              </a:p>
-            </p:txBody>
-          </p:sp>
-        </mc:Choice>
-        <mc:Fallback>
-          <p:sp>
-            <p:nvSpPr>
-              <p:cNvPr id="230" name="TextBox 229">
-                <a:extLst>
-                  <a:ext uri="{FF2B5EF4-FFF2-40B4-BE49-F238E27FC236}">
-                    <a16:creationId xmlns:a16="http://schemas.microsoft.com/office/drawing/2014/main" id="{5642B236-C7AA-B866-7543-6ED585919212}"/>
-                  </a:ext>
-                </a:extLst>
-              </p:cNvPr>
-              <p:cNvSpPr txBox="1">
-                <a:spLocks noRot="1" noChangeAspect="1" noMove="1" noResize="1" noEditPoints="1" noAdjustHandles="1" noChangeArrowheads="1" noChangeShapeType="1" noTextEdit="1"/>
-              </p:cNvSpPr>
-              <p:nvPr/>
-            </p:nvSpPr>
-            <p:spPr>
-              <a:xfrm>
-                <a:off x="5881797" y="1960073"/>
-                <a:ext cx="542136" cy="294504"/>
-              </a:xfrm>
-              <a:prstGeom prst="rect">
-                <a:avLst/>
-              </a:prstGeom>
-              <a:blipFill>
-                <a:blip r:embed="rId14"/>
-                <a:stretch>
-                  <a:fillRect/>
-                </a:stretch>
-              </a:blipFill>
-            </p:spPr>
-            <p:txBody>
-              <a:bodyPr/>
-              <a:lstStyle/>
-              <a:p>
-                <a:r>
-                  <a:rPr lang="en-US">
-                    <a:noFill/>
-                  </a:rPr>
-                  <a:t> </a:t>
-                </a:r>
-              </a:p>
-            </p:txBody>
-          </p:sp>
-        </mc:Fallback>
-      </mc:AlternateContent>
-      <mc:AlternateContent xmlns:mc="http://schemas.openxmlformats.org/markup-compatibility/2006">
-        <mc:Choice xmlns:a14="http://schemas.microsoft.com/office/drawing/2010/main" Requires="a14">
-          <p:sp>
-            <p:nvSpPr>
-              <p:cNvPr id="232" name="TextBox 231">
-                <a:extLst>
-                  <a:ext uri="{FF2B5EF4-FFF2-40B4-BE49-F238E27FC236}">
-                    <a16:creationId xmlns:a16="http://schemas.microsoft.com/office/drawing/2014/main" id="{5700950F-3B34-718A-8163-1D341FD6866B}"/>
-                  </a:ext>
-                </a:extLst>
-              </p:cNvPr>
-              <p:cNvSpPr txBox="1"/>
-              <p:nvPr/>
-            </p:nvSpPr>
-            <p:spPr>
-              <a:xfrm>
-                <a:off x="5904813" y="2756330"/>
-                <a:ext cx="545342" cy="294504"/>
-              </a:xfrm>
-              <a:prstGeom prst="rect">
-                <a:avLst/>
-              </a:prstGeom>
-              <a:noFill/>
-            </p:spPr>
-            <p:txBody>
-              <a:bodyPr wrap="none" rtlCol="0">
-                <a:spAutoFit/>
-              </a:bodyPr>
-              <a:lstStyle/>
-              <a:p>
-                <a:pPr/>
-                <a14:m>
-                  <m:oMathPara xmlns:m="http://schemas.openxmlformats.org/officeDocument/2006/math">
-                    <m:oMath>
-                      <m:sSub>
-                        <m:sSubPr>
-                          <m:ctrlPr>
-                            <a:rPr lang="de-DE" sz="1200" i="1">
-                              <a:latin typeface="Cambria Math" panose="02040503050406030204" pitchFamily="18" charset="0"/>
-                            </a:rPr>
-                          </m:ctrlPr>
-                        </m:sSubPr>
-                        <m:e>
-                          <m:r>
-                            <m:rPr>
-                              <m:sty m:val="p"/>
-                            </m:rPr>
-                            <a:rPr lang="de-DE" sz="1200" i="1">
-                              <a:latin typeface="Cambria Math" panose="02040503050406030204" pitchFamily="18" charset="0"/>
-                            </a:rPr>
-                            <m:t>m</m:t>
-                          </m:r>
-                        </m:e>
-                        <m:sub>
-                          <m:r>
-                            <m:rPr>
-                              <m:sty m:val="p"/>
-                            </m:rPr>
-                            <a:rPr lang="en-GB" sz="1200" b="0" i="1" smtClean="0">
-                              <a:latin typeface="Cambria Math" panose="02040503050406030204" pitchFamily="18" charset="0"/>
-                            </a:rPr>
-                            <m:t>F</m:t>
-                          </m:r>
-                          <m:r>
-                            <m:rPr>
-                              <m:sty m:val="p"/>
-                            </m:rPr>
-                            <a:rPr lang="en-GB" sz="1200" b="0" i="1" smtClean="0">
-                              <a:latin typeface="Cambria Math" panose="02040503050406030204" pitchFamily="18" charset="0"/>
-                            </a:rPr>
-                            <m:t>g</m:t>
-                          </m:r>
-                          <m:r>
-                            <a:rPr lang="en-GB" sz="1200" b="0" i="1" smtClean="0">
-                              <a:latin typeface="Cambria Math" panose="02040503050406030204" pitchFamily="18" charset="0"/>
-                            </a:rPr>
-                            <m:t>1</m:t>
-                          </m:r>
-                        </m:sub>
-                      </m:sSub>
-                    </m:oMath>
-                  </m:oMathPara>
-                </a14:m>
-                <a:endParaRPr lang="en-US" sz="1200" dirty="0"/>
-              </a:p>
-            </p:txBody>
-          </p:sp>
-        </mc:Choice>
-        <mc:Fallback>
-          <p:sp>
-            <p:nvSpPr>
-              <p:cNvPr id="232" name="TextBox 231">
-                <a:extLst>
-                  <a:ext uri="{FF2B5EF4-FFF2-40B4-BE49-F238E27FC236}">
-                    <a16:creationId xmlns:a16="http://schemas.microsoft.com/office/drawing/2014/main" id="{5700950F-3B34-718A-8163-1D341FD6866B}"/>
-                  </a:ext>
-                </a:extLst>
-              </p:cNvPr>
-              <p:cNvSpPr txBox="1">
-                <a:spLocks noRot="1" noChangeAspect="1" noMove="1" noResize="1" noEditPoints="1" noAdjustHandles="1" noChangeArrowheads="1" noChangeShapeType="1" noTextEdit="1"/>
-              </p:cNvSpPr>
-              <p:nvPr/>
-            </p:nvSpPr>
-            <p:spPr>
-              <a:xfrm>
-                <a:off x="5904813" y="2756330"/>
-                <a:ext cx="545342" cy="294504"/>
-              </a:xfrm>
-              <a:prstGeom prst="rect">
-                <a:avLst/>
-              </a:prstGeom>
-              <a:blipFill>
-                <a:blip r:embed="rId15"/>
-                <a:stretch>
-                  <a:fillRect/>
-                </a:stretch>
-              </a:blipFill>
-            </p:spPr>
-            <p:txBody>
-              <a:bodyPr/>
-              <a:lstStyle/>
-              <a:p>
-                <a:r>
-                  <a:rPr lang="en-US">
-                    <a:noFill/>
-                  </a:rPr>
-                  <a:t> </a:t>
-                </a:r>
-              </a:p>
-            </p:txBody>
-          </p:sp>
-        </mc:Fallback>
-      </mc:AlternateContent>
-      <mc:AlternateContent xmlns:mc="http://schemas.openxmlformats.org/markup-compatibility/2006">
-        <mc:Choice xmlns:a14="http://schemas.microsoft.com/office/drawing/2010/main" Requires="a14">
-          <p:sp>
-            <p:nvSpPr>
-              <p:cNvPr id="234" name="TextBox 233">
-                <a:extLst>
-                  <a:ext uri="{FF2B5EF4-FFF2-40B4-BE49-F238E27FC236}">
-                    <a16:creationId xmlns:a16="http://schemas.microsoft.com/office/drawing/2014/main" id="{B80AF93D-6246-21F1-FC91-BAF388E42A6A}"/>
-                  </a:ext>
-                </a:extLst>
-              </p:cNvPr>
-              <p:cNvSpPr txBox="1"/>
-              <p:nvPr/>
-            </p:nvSpPr>
-            <p:spPr>
-              <a:xfrm>
-                <a:off x="6696148" y="1977578"/>
-                <a:ext cx="487633" cy="276999"/>
-              </a:xfrm>
-              <a:prstGeom prst="rect">
-                <a:avLst/>
-              </a:prstGeom>
-              <a:noFill/>
-            </p:spPr>
-            <p:txBody>
-              <a:bodyPr wrap="none" rtlCol="0">
-                <a:spAutoFit/>
-              </a:bodyPr>
-              <a:lstStyle/>
-              <a:p>
-                <a:pPr/>
-                <a14:m>
-                  <m:oMathPara xmlns:m="http://schemas.openxmlformats.org/officeDocument/2006/math">
-                    <m:oMath>
-                      <m:sSub>
-                        <m:sSubPr>
-                          <m:ctrlPr>
-                            <a:rPr lang="de-DE" sz="1200" i="1">
-                              <a:latin typeface="Cambria Math" panose="02040503050406030204" pitchFamily="18" charset="0"/>
-                            </a:rPr>
-                          </m:ctrlPr>
-                        </m:sSubPr>
-                        <m:e>
-                          <m:r>
-                            <m:rPr>
-                              <m:sty m:val="p"/>
-                            </m:rPr>
-                            <a:rPr lang="de-DE" sz="1200" i="1">
-                              <a:latin typeface="Cambria Math" panose="02040503050406030204" pitchFamily="18" charset="0"/>
-                            </a:rPr>
-                            <m:t>m</m:t>
-                          </m:r>
-                        </m:e>
-                        <m:sub>
-                          <m:r>
-                            <m:rPr>
-                              <m:sty m:val="p"/>
-                            </m:rPr>
-                            <a:rPr lang="en-GB" sz="1200" b="0" i="1" smtClean="0">
-                              <a:latin typeface="Cambria Math" panose="02040503050406030204" pitchFamily="18" charset="0"/>
-                            </a:rPr>
-                            <m:t>d</m:t>
-                          </m:r>
-                          <m:r>
-                            <a:rPr lang="en-GB" sz="1200" b="0" i="1" smtClean="0">
-                              <a:latin typeface="Cambria Math" panose="02040503050406030204" pitchFamily="18" charset="0"/>
-                            </a:rPr>
-                            <m:t>1</m:t>
-                          </m:r>
-                        </m:sub>
-                      </m:sSub>
-                    </m:oMath>
-                  </m:oMathPara>
-                </a14:m>
-                <a:endParaRPr lang="en-US" sz="1200" dirty="0"/>
-              </a:p>
-            </p:txBody>
-          </p:sp>
-        </mc:Choice>
-        <mc:Fallback>
-          <p:sp>
-            <p:nvSpPr>
-              <p:cNvPr id="234" name="TextBox 233">
-                <a:extLst>
-                  <a:ext uri="{FF2B5EF4-FFF2-40B4-BE49-F238E27FC236}">
-                    <a16:creationId xmlns:a16="http://schemas.microsoft.com/office/drawing/2014/main" id="{B80AF93D-6246-21F1-FC91-BAF388E42A6A}"/>
-                  </a:ext>
-                </a:extLst>
-              </p:cNvPr>
-              <p:cNvSpPr txBox="1">
-                <a:spLocks noRot="1" noChangeAspect="1" noMove="1" noResize="1" noEditPoints="1" noAdjustHandles="1" noChangeArrowheads="1" noChangeShapeType="1" noTextEdit="1"/>
-              </p:cNvSpPr>
-              <p:nvPr/>
-            </p:nvSpPr>
-            <p:spPr>
-              <a:xfrm>
-                <a:off x="6696148" y="1977578"/>
-                <a:ext cx="487633" cy="276999"/>
-              </a:xfrm>
-              <a:prstGeom prst="rect">
-                <a:avLst/>
-              </a:prstGeom>
-              <a:blipFill>
-                <a:blip r:embed="rId16"/>
+                <a:blip r:embed="rId11"/>
                 <a:stretch>
                   <a:fillRect/>
                 </a:stretch>
